--- a/crypto_04_payment.pptx
+++ b/crypto_04_payment.pptx
@@ -20,11 +20,11 @@
     <p:sldId id="318" r:id="rId11"/>
     <p:sldId id="319" r:id="rId12"/>
     <p:sldId id="320" r:id="rId13"/>
-    <p:sldId id="276" r:id="rId14"/>
-    <p:sldId id="264" r:id="rId15"/>
-    <p:sldId id="316" r:id="rId16"/>
-    <p:sldId id="315" r:id="rId17"/>
-    <p:sldId id="321" r:id="rId18"/>
+    <p:sldId id="322" r:id="rId14"/>
+    <p:sldId id="323" r:id="rId15"/>
+    <p:sldId id="321" r:id="rId16"/>
+    <p:sldId id="325" r:id="rId17"/>
+    <p:sldId id="315" r:id="rId18"/>
     <p:sldId id="266" r:id="rId19"/>
     <p:sldId id="283" r:id="rId20"/>
     <p:sldId id="308" r:id="rId21"/>
@@ -762,67 +762,6 @@
 </p:notes>
 </file>
 
-<file path=ppt/notesSlides/notesSlide4.xml><?xml version="1.0" encoding="utf-8"?>
-<p:notes xmlns:a="http://schemas.openxmlformats.org/drawingml/2006/main" xmlns:r="http://schemas.openxmlformats.org/officeDocument/2006/relationships" xmlns:p="http://schemas.openxmlformats.org/presentationml/2006/main">
-  <p:cSld>
-    <p:spTree>
-      <p:nvGrpSpPr>
-        <p:cNvPr id="1" name=""/>
-        <p:cNvGrpSpPr/>
-        <p:nvPr/>
-      </p:nvGrpSpPr>
-      <p:grpSpPr>
-        <a:xfrm>
-          <a:off x="0" y="0"/>
-          <a:ext cx="0" cy="0"/>
-          <a:chOff x="0" y="0"/>
-          <a:chExt cx="0" cy="0"/>
-        </a:xfrm>
-      </p:grpSpPr>
-      <p:sp>
-        <p:nvSpPr>
-          <p:cNvPr id="2" name="Slide Image Placeholder 1"/>
-          <p:cNvSpPr>
-            <a:spLocks noGrp="1" noRot="1" noChangeAspect="1"/>
-          </p:cNvSpPr>
-          <p:nvPr>
-            <p:ph type="sldImg"/>
-          </p:nvPr>
-        </p:nvSpPr>
-        <p:spPr/>
-      </p:sp>
-      <p:sp>
-        <p:nvSpPr>
-          <p:cNvPr id="3" name="Notes Placeholder 2"/>
-          <p:cNvSpPr>
-            <a:spLocks noGrp="1"/>
-          </p:cNvSpPr>
-          <p:nvPr>
-            <p:ph type="body" idx="1"/>
-          </p:nvPr>
-        </p:nvSpPr>
-        <p:spPr/>
-        <p:txBody>
-          <a:bodyPr/>
-          <a:lstStyle/>
-          <a:p>
-            <a:endParaRPr lang="en-US"/>
-          </a:p>
-        </p:txBody>
-      </p:sp>
-    </p:spTree>
-    <p:extLst>
-      <p:ext uri="{BB962C8B-B14F-4D97-AF65-F5344CB8AC3E}">
-        <p14:creationId xmlns:p14="http://schemas.microsoft.com/office/powerpoint/2010/main" val="296614081"/>
-      </p:ext>
-    </p:extLst>
-  </p:cSld>
-  <p:clrMapOvr>
-    <a:masterClrMapping/>
-  </p:clrMapOvr>
-</p:notes>
-</file>
-
 <file path=ppt/slideLayouts/slideLayout1.xml><?xml version="1.0" encoding="utf-8"?>
 <p:sldLayout xmlns:a="http://schemas.openxmlformats.org/drawingml/2006/main" xmlns:r="http://schemas.openxmlformats.org/officeDocument/2006/relationships" xmlns:p="http://schemas.openxmlformats.org/presentationml/2006/main" type="title" preserve="1">
   <p:cSld name="Title Slide">
@@ -952,7 +891,7 @@
           <a:p>
             <a:fld id="{EB1FAE4C-5332-014D-8E1B-BB8DA73EF81D}" type="datetimeFigureOut">
               <a:rPr lang="en-US"/>
-              <a:t>4/20/22</a:t>
+              <a:t>4/29/22</a:t>
             </a:fld>
             <a:endParaRPr lang="en-US"/>
           </a:p>
@@ -1122,7 +1061,7 @@
           <a:p>
             <a:fld id="{EB1FAE4C-5332-014D-8E1B-BB8DA73EF81D}" type="datetimeFigureOut">
               <a:rPr lang="en-US"/>
-              <a:t>4/20/22</a:t>
+              <a:t>4/29/22</a:t>
             </a:fld>
             <a:endParaRPr lang="en-US"/>
           </a:p>
@@ -1302,7 +1241,7 @@
           <a:p>
             <a:fld id="{EB1FAE4C-5332-014D-8E1B-BB8DA73EF81D}" type="datetimeFigureOut">
               <a:rPr lang="en-US"/>
-              <a:t>4/20/22</a:t>
+              <a:t>4/29/22</a:t>
             </a:fld>
             <a:endParaRPr lang="en-US"/>
           </a:p>
@@ -1472,7 +1411,7 @@
           <a:p>
             <a:fld id="{EB1FAE4C-5332-014D-8E1B-BB8DA73EF81D}" type="datetimeFigureOut">
               <a:rPr lang="en-US"/>
-              <a:t>4/20/22</a:t>
+              <a:t>4/29/22</a:t>
             </a:fld>
             <a:endParaRPr lang="en-US"/>
           </a:p>
@@ -1719,7 +1658,7 @@
           <a:p>
             <a:fld id="{EB1FAE4C-5332-014D-8E1B-BB8DA73EF81D}" type="datetimeFigureOut">
               <a:rPr lang="en-US"/>
-              <a:t>4/20/22</a:t>
+              <a:t>4/29/22</a:t>
             </a:fld>
             <a:endParaRPr lang="en-US"/>
           </a:p>
@@ -1950,7 +1889,7 @@
           <a:p>
             <a:fld id="{EB1FAE4C-5332-014D-8E1B-BB8DA73EF81D}" type="datetimeFigureOut">
               <a:rPr lang="en-US"/>
-              <a:t>4/20/22</a:t>
+              <a:t>4/29/22</a:t>
             </a:fld>
             <a:endParaRPr lang="en-US"/>
           </a:p>
@@ -2316,7 +2255,7 @@
           <a:p>
             <a:fld id="{EB1FAE4C-5332-014D-8E1B-BB8DA73EF81D}" type="datetimeFigureOut">
               <a:rPr lang="en-US"/>
-              <a:t>4/20/22</a:t>
+              <a:t>4/29/22</a:t>
             </a:fld>
             <a:endParaRPr lang="en-US"/>
           </a:p>
@@ -2435,7 +2374,7 @@
           <a:p>
             <a:fld id="{EB1FAE4C-5332-014D-8E1B-BB8DA73EF81D}" type="datetimeFigureOut">
               <a:rPr lang="en-US"/>
-              <a:t>4/20/22</a:t>
+              <a:t>4/29/22</a:t>
             </a:fld>
             <a:endParaRPr lang="en-US"/>
           </a:p>
@@ -2532,7 +2471,7 @@
           <a:p>
             <a:fld id="{EB1FAE4C-5332-014D-8E1B-BB8DA73EF81D}" type="datetimeFigureOut">
               <a:rPr lang="en-US"/>
-              <a:t>4/20/22</a:t>
+              <a:t>4/29/22</a:t>
             </a:fld>
             <a:endParaRPr lang="en-US"/>
           </a:p>
@@ -2808,7 +2747,7 @@
           <a:p>
             <a:fld id="{EB1FAE4C-5332-014D-8E1B-BB8DA73EF81D}" type="datetimeFigureOut">
               <a:rPr lang="en-US"/>
-              <a:t>4/20/22</a:t>
+              <a:t>4/29/22</a:t>
             </a:fld>
             <a:endParaRPr lang="en-US"/>
           </a:p>
@@ -3065,7 +3004,7 @@
           <a:p>
             <a:fld id="{EB1FAE4C-5332-014D-8E1B-BB8DA73EF81D}" type="datetimeFigureOut">
               <a:rPr lang="en-US"/>
-              <a:t>4/20/22</a:t>
+              <a:t>4/29/22</a:t>
             </a:fld>
             <a:endParaRPr lang="en-US"/>
           </a:p>
@@ -3278,7 +3217,7 @@
           <a:p>
             <a:fld id="{EB1FAE4C-5332-014D-8E1B-BB8DA73EF81D}" type="datetimeFigureOut">
               <a:rPr lang="en-US"/>
-              <a:t>4/20/22</a:t>
+              <a:t>4/29/22</a:t>
             </a:fld>
             <a:endParaRPr lang="en-US"/>
           </a:p>
@@ -6023,7 +5962,7 @@
           <p:cNvPr id="2" name="TextBox 1">
             <a:extLst>
               <a:ext uri="{FF2B5EF4-FFF2-40B4-BE49-F238E27FC236}">
-                <a16:creationId xmlns:a16="http://schemas.microsoft.com/office/drawing/2014/main" id="{210D5B8D-BE4D-BB41-ABFF-EFE774092AF5}"/>
+                <a16:creationId xmlns:a16="http://schemas.microsoft.com/office/drawing/2014/main" id="{E7110EDD-1316-6D4C-4930-BCFF121273CA}"/>
               </a:ext>
             </a:extLst>
           </p:cNvPr>
@@ -6032,8 +5971,8 @@
         </p:nvSpPr>
         <p:spPr>
           <a:xfrm>
-            <a:off x="6754809" y="161226"/>
-            <a:ext cx="5440919" cy="3108543"/>
+            <a:off x="-1" y="0"/>
+            <a:ext cx="2072641" cy="523220"/>
           </a:xfrm>
           <a:prstGeom prst="rect">
             <a:avLst/>
@@ -6046,132 +5985,19 @@
           </a:bodyPr>
           <a:lstStyle/>
           <a:p>
-            <a:pPr marL="380990" indent="-380990">
-              <a:buFont typeface="Arial" panose="020B0604020202020204" pitchFamily="34" charset="0"/>
-              <a:buChar char="•"/>
-            </a:pPr>
-            <a:r>
-              <a:rPr lang="en-US" sz="1400">
-                <a:hlinkClick r:id="rId2"/>
-              </a:rPr>
-              <a:t>https://metamask.io/</a:t>
-            </a:r>
-            <a:endParaRPr lang="en-US" sz="1400"/>
-          </a:p>
-          <a:p>
-            <a:pPr marL="380990" indent="-380990">
-              <a:buFont typeface="Arial" panose="020B0604020202020204" pitchFamily="34" charset="0"/>
-              <a:buChar char="•"/>
-            </a:pPr>
-            <a:r>
-              <a:rPr lang="en-US" sz="1400">
-                <a:hlinkClick r:id="rId3"/>
-              </a:rPr>
-              <a:t>https://en.wikipedia.org/wiki/MetaMask</a:t>
-            </a:r>
-            <a:endParaRPr lang="en-US" sz="1400"/>
-          </a:p>
-          <a:p>
-            <a:pPr marL="380990" indent="-380990">
-              <a:buFont typeface="Arial" panose="020B0604020202020204" pitchFamily="34" charset="0"/>
-              <a:buChar char="•"/>
-            </a:pPr>
-            <a:r>
-              <a:rPr lang="en-US" sz="1400" b="1">
-                <a:solidFill>
-                  <a:srgbClr val="00B050"/>
-                </a:solidFill>
-              </a:rPr>
-              <a:t>A software cryptocurrency wallet for Etherium blockchain</a:t>
-            </a:r>
-          </a:p>
-          <a:p>
-            <a:pPr marL="380990" indent="-380990">
-              <a:buFont typeface="Arial" panose="020B0604020202020204" pitchFamily="34" charset="0"/>
-              <a:buChar char="•"/>
-            </a:pPr>
-            <a:r>
-              <a:rPr lang="en-US" sz="1400"/>
-              <a:t>A secure browser extension or mobile app </a:t>
-            </a:r>
-            <a:br>
-              <a:rPr lang="en-US" sz="1400"/>
-            </a:br>
-            <a:r>
-              <a:rPr lang="en-US" sz="1400"/>
-              <a:t>(iOS, Android)</a:t>
-            </a:r>
-          </a:p>
-          <a:p>
-            <a:pPr marL="380990" indent="-380990">
-              <a:buFont typeface="Arial" panose="020B0604020202020204" pitchFamily="34" charset="0"/>
-              <a:buChar char="•"/>
-            </a:pPr>
-            <a:r>
-              <a:rPr lang="en-US" sz="1400"/>
-              <a:t>Allows to interact with decentralized applications</a:t>
-            </a:r>
-          </a:p>
-          <a:p>
-            <a:pPr marL="380990" indent="-380990">
-              <a:buFont typeface="Arial" panose="020B0604020202020204" pitchFamily="34" charset="0"/>
-              <a:buChar char="•"/>
-            </a:pPr>
-            <a:r>
-              <a:rPr lang="en-US" sz="1400"/>
-              <a:t>Since 2016 </a:t>
-            </a:r>
-          </a:p>
-          <a:p>
-            <a:pPr marL="380990" indent="-380990">
-              <a:buFont typeface="Arial" panose="020B0604020202020204" pitchFamily="34" charset="0"/>
-              <a:buChar char="•"/>
-            </a:pPr>
-            <a:r>
-              <a:rPr lang="en-US" sz="1400"/>
-              <a:t>More than 20 Mln users</a:t>
-            </a:r>
-          </a:p>
-          <a:p>
-            <a:pPr marL="380990" indent="-380990">
-              <a:buFont typeface="Arial" panose="020B0604020202020204" pitchFamily="34" charset="0"/>
-              <a:buChar char="•"/>
-            </a:pPr>
-            <a:r>
-              <a:rPr lang="en-US" sz="1400"/>
-              <a:t>Developed by ConsenSys - a blockchain software technology company founded by </a:t>
-            </a:r>
-            <a:r>
-              <a:rPr lang="en-US" sz="1400" b="1">
-                <a:solidFill>
-                  <a:srgbClr val="0070C0"/>
-                </a:solidFill>
-              </a:rPr>
-              <a:t>Joseph Lubin</a:t>
-            </a:r>
-            <a:r>
-              <a:rPr lang="en-US" sz="1400"/>
-              <a:t> with headquarters in Brooklyn, New York</a:t>
-            </a:r>
-          </a:p>
-          <a:p>
-            <a:pPr marL="380990" indent="-380990">
-              <a:buFont typeface="Arial" panose="020B0604020202020204" pitchFamily="34" charset="0"/>
-              <a:buChar char="•"/>
-            </a:pPr>
-            <a:r>
-              <a:rPr lang="en-US" sz="1400"/>
-              <a:t>Bitcoin cannot be stored on MetaMask, but you can store a "Wrapped Bitcoin" (WBTC) – which is an ERC-20 token that represents Bitcoin on the Ethereum blockchain</a:t>
-            </a:r>
-          </a:p>
-        </p:txBody>
-      </p:sp>
-      <p:sp>
-        <p:nvSpPr>
-          <p:cNvPr id="3" name="TextBox 2">
+            <a:r>
+              <a:rPr lang="en-US" sz="2800" b="1"/>
+              <a:t>Ripple</a:t>
+            </a:r>
+          </a:p>
+        </p:txBody>
+      </p:sp>
+      <p:sp>
+        <p:nvSpPr>
+          <p:cNvPr id="4" name="TextBox 3">
             <a:extLst>
               <a:ext uri="{FF2B5EF4-FFF2-40B4-BE49-F238E27FC236}">
-                <a16:creationId xmlns:a16="http://schemas.microsoft.com/office/drawing/2014/main" id="{E6BD177C-95D2-6D49-ABE7-6DD29457A006}"/>
+                <a16:creationId xmlns:a16="http://schemas.microsoft.com/office/drawing/2014/main" id="{D450E834-9C35-33AB-8443-28E59C3504FF}"/>
               </a:ext>
             </a:extLst>
           </p:cNvPr>
@@ -6180,8 +6006,8 @@
         </p:nvSpPr>
         <p:spPr>
           <a:xfrm>
-            <a:off x="-23443" y="1"/>
-            <a:ext cx="2157622" cy="523220"/>
+            <a:off x="0" y="509286"/>
+            <a:ext cx="4898571" cy="1384995"/>
           </a:xfrm>
           <a:prstGeom prst="rect">
             <a:avLst/>
@@ -6194,19 +6020,410 @@
           </a:bodyPr>
           <a:lstStyle/>
           <a:p>
-            <a:r>
-              <a:rPr lang="en-US" sz="2800" b="1"/>
-              <a:t>MetaMask</a:t>
+            <a:pPr marL="285750" indent="-285750">
+              <a:buFont typeface="Arial" panose="020B0604020202020204" pitchFamily="34" charset="0"/>
+              <a:buChar char="•"/>
+            </a:pPr>
+            <a:r>
+              <a:rPr lang="en-US" sz="1200">
+                <a:hlinkClick r:id="rId2"/>
+              </a:rPr>
+              <a:t>https://en.wikipedia.org/wiki/Ripple_(payment_protocol)</a:t>
+            </a:r>
+            <a:r>
+              <a:rPr lang="en-US" sz="1200"/>
+              <a:t> - </a:t>
+            </a:r>
+          </a:p>
+          <a:p>
+            <a:pPr marL="285750" indent="-285750">
+              <a:buFont typeface="Arial" panose="020B0604020202020204" pitchFamily="34" charset="0"/>
+              <a:buChar char="•"/>
+            </a:pPr>
+            <a:r>
+              <a:rPr lang="en-US" sz="1200">
+                <a:hlinkClick r:id="rId3"/>
+              </a:rPr>
+              <a:t>https://en.wikipedia.org/wiki/Ripple_Labs</a:t>
+            </a:r>
+            <a:r>
+              <a:rPr lang="en-US" sz="1200"/>
+              <a:t> - </a:t>
+            </a:r>
+          </a:p>
+          <a:p>
+            <a:pPr marL="285750" indent="-285750">
+              <a:buFont typeface="Arial" panose="020B0604020202020204" pitchFamily="34" charset="0"/>
+              <a:buChar char="•"/>
+            </a:pPr>
+            <a:r>
+              <a:rPr lang="en-US" sz="1200">
+                <a:hlinkClick r:id="rId4"/>
+              </a:rPr>
+              <a:t>https://ripple.com</a:t>
+            </a:r>
+            <a:r>
+              <a:rPr lang="en-US" sz="1200"/>
+              <a:t> - </a:t>
+            </a:r>
+          </a:p>
+          <a:p>
+            <a:pPr marL="285750" indent="-285750">
+              <a:buFont typeface="Arial" panose="020B0604020202020204" pitchFamily="34" charset="0"/>
+              <a:buChar char="•"/>
+            </a:pPr>
+            <a:r>
+              <a:rPr lang="en-US" sz="1200">
+                <a:hlinkClick r:id="rId5"/>
+              </a:rPr>
+              <a:t>https://github.com/ripple/rippled</a:t>
+            </a:r>
+            <a:r>
+              <a:rPr lang="en-US" sz="1200"/>
+              <a:t> - </a:t>
+            </a:r>
+          </a:p>
+          <a:p>
+            <a:pPr marL="285750" indent="-285750">
+              <a:buFont typeface="Arial" panose="020B0604020202020204" pitchFamily="34" charset="0"/>
+              <a:buChar char="•"/>
+            </a:pPr>
+            <a:r>
+              <a:rPr lang="en-US" sz="1200">
+                <a:hlinkClick r:id="rId6"/>
+              </a:rPr>
+              <a:t>https://github.com/ripple/ripple-rest</a:t>
+            </a:r>
+            <a:r>
+              <a:rPr lang="en-US" sz="1200"/>
+              <a:t> - REST API</a:t>
+            </a:r>
+          </a:p>
+          <a:p>
+            <a:pPr marL="285750" indent="-285750">
+              <a:buFont typeface="Arial" panose="020B0604020202020204" pitchFamily="34" charset="0"/>
+              <a:buChar char="•"/>
+            </a:pPr>
+            <a:r>
+              <a:rPr lang="en-US" sz="1200">
+                <a:hlinkClick r:id="rId7"/>
+              </a:rPr>
+              <a:t>https://xrpl.org/get-started-using-python.html</a:t>
+            </a:r>
+            <a:r>
+              <a:rPr lang="en-US" sz="1200"/>
+              <a:t> - python </a:t>
+            </a:r>
+          </a:p>
+          <a:p>
+            <a:pPr marL="285750" indent="-285750">
+              <a:buFont typeface="Arial" panose="020B0604020202020204" pitchFamily="34" charset="0"/>
+              <a:buChar char="•"/>
+            </a:pPr>
+            <a:r>
+              <a:rPr lang="en-US" sz="1200">
+                <a:hlinkClick r:id="rId8"/>
+              </a:rPr>
+              <a:t>https://github.com/arsenlosenko/python-ripple-lib</a:t>
+            </a:r>
+            <a:r>
+              <a:rPr lang="en-US" sz="1200"/>
+              <a:t> - </a:t>
+            </a:r>
+          </a:p>
+        </p:txBody>
+      </p:sp>
+      <p:sp>
+        <p:nvSpPr>
+          <p:cNvPr id="5" name="TextBox 4">
+            <a:extLst>
+              <a:ext uri="{FF2B5EF4-FFF2-40B4-BE49-F238E27FC236}">
+                <a16:creationId xmlns:a16="http://schemas.microsoft.com/office/drawing/2014/main" id="{98ACFF17-6F73-7014-B5A1-972FD9DD09A1}"/>
+              </a:ext>
+            </a:extLst>
+          </p:cNvPr>
+          <p:cNvSpPr txBox="1"/>
+          <p:nvPr/>
+        </p:nvSpPr>
+        <p:spPr>
+          <a:xfrm>
+            <a:off x="0" y="2070620"/>
+            <a:ext cx="6746033" cy="3323987"/>
+          </a:xfrm>
+          <a:prstGeom prst="rect">
+            <a:avLst/>
+          </a:prstGeom>
+          <a:noFill/>
+        </p:spPr>
+        <p:txBody>
+          <a:bodyPr wrap="square" rtlCol="0">
+            <a:spAutoFit/>
+          </a:bodyPr>
+          <a:lstStyle/>
+          <a:p>
+            <a:pPr marL="285750" indent="-285750">
+              <a:buFont typeface="Arial" panose="020B0604020202020204" pitchFamily="34" charset="0"/>
+              <a:buChar char="•"/>
+            </a:pPr>
+            <a:r>
+              <a:rPr lang="en-US" sz="1400" b="1">
+                <a:solidFill>
+                  <a:srgbClr val="00B050"/>
+                </a:solidFill>
+              </a:rPr>
+              <a:t>Ripple</a:t>
+            </a:r>
+            <a:r>
+              <a:rPr lang="en-US" sz="1400"/>
+              <a:t> ( RippleNet ) - a real-time gross settlement system, currency exchange and remittance global network. Used by 300+ binancial institutions (banks) </a:t>
+            </a:r>
+          </a:p>
+          <a:p>
+            <a:pPr marL="285750" indent="-285750">
+              <a:buFont typeface="Arial" panose="020B0604020202020204" pitchFamily="34" charset="0"/>
+              <a:buChar char="•"/>
+            </a:pPr>
+            <a:r>
+              <a:rPr lang="en-US" sz="1400" b="1">
+                <a:solidFill>
+                  <a:srgbClr val="00B050"/>
+                </a:solidFill>
+              </a:rPr>
+              <a:t>XRP</a:t>
+            </a:r>
+            <a:r>
+              <a:rPr lang="en-US" sz="1400"/>
+              <a:t> - native </a:t>
+            </a:r>
+            <a:r>
+              <a:rPr lang="en-US" sz="1400" b="1">
+                <a:solidFill>
+                  <a:srgbClr val="00B050"/>
+                </a:solidFill>
+              </a:rPr>
+              <a:t>Ripple</a:t>
+            </a:r>
+            <a:r>
+              <a:rPr lang="en-US" sz="1400"/>
+              <a:t> cryptocurrency, price ~ $0.76, in circulation ~48 Bln coins, traded on more than 700 markets, daily trade volume ~ $2 Bln</a:t>
+            </a:r>
+          </a:p>
+          <a:p>
+            <a:pPr marL="285750" indent="-285750">
+              <a:buFont typeface="Arial" panose="020B0604020202020204" pitchFamily="34" charset="0"/>
+              <a:buChar char="•"/>
+            </a:pPr>
+            <a:r>
+              <a:rPr lang="en-US" sz="1400"/>
+              <a:t>XRP transactions are confirmed in seconds with little cost</a:t>
+            </a:r>
+          </a:p>
+          <a:p>
+            <a:pPr marL="285750" indent="-285750">
+              <a:buFont typeface="Arial" panose="020B0604020202020204" pitchFamily="34" charset="0"/>
+              <a:buChar char="•"/>
+            </a:pPr>
+            <a:r>
+              <a:rPr lang="en-US" sz="1400" b="1">
+                <a:solidFill>
+                  <a:srgbClr val="00B050"/>
+                </a:solidFill>
+              </a:rPr>
+              <a:t>Ripple </a:t>
+            </a:r>
+            <a:r>
+              <a:rPr lang="en-US" sz="1400"/>
+              <a:t>created by </a:t>
+            </a:r>
+            <a:r>
+              <a:rPr lang="en-US" sz="1400" b="1">
+                <a:solidFill>
+                  <a:srgbClr val="00B050"/>
+                </a:solidFill>
+              </a:rPr>
+              <a:t>Ripple Labs Inc.</a:t>
+            </a:r>
+            <a:r>
+              <a:rPr lang="en-US" sz="1400"/>
+              <a:t> (San Francisco, New York), ~ 670 employees</a:t>
+            </a:r>
+          </a:p>
+          <a:p>
+            <a:pPr marL="285750" indent="-285750">
+              <a:buFont typeface="Arial" panose="020B0604020202020204" pitchFamily="34" charset="0"/>
+              <a:buChar char="•"/>
+            </a:pPr>
+            <a:r>
+              <a:rPr lang="en-US" sz="1400" b="1">
+                <a:solidFill>
+                  <a:srgbClr val="00B050"/>
+                </a:solidFill>
+              </a:rPr>
+              <a:t>Ripple </a:t>
+            </a:r>
+            <a:r>
+              <a:rPr lang="en-US" sz="1400"/>
+              <a:t>released in 2012</a:t>
+            </a:r>
+          </a:p>
+          <a:p>
+            <a:pPr marL="285750" indent="-285750">
+              <a:buFont typeface="Arial" panose="020B0604020202020204" pitchFamily="34" charset="0"/>
+              <a:buChar char="•"/>
+            </a:pPr>
+            <a:r>
+              <a:rPr lang="en-US" sz="1400" b="1">
+                <a:solidFill>
+                  <a:srgbClr val="00B050"/>
+                </a:solidFill>
+              </a:rPr>
+              <a:t>Ripple</a:t>
+            </a:r>
+            <a:r>
+              <a:rPr lang="en-US" sz="1400"/>
+              <a:t> is built upon a distributed open source protocol</a:t>
+            </a:r>
+          </a:p>
+          <a:p>
+            <a:pPr marL="285750" indent="-285750">
+              <a:buFont typeface="Arial" panose="020B0604020202020204" pitchFamily="34" charset="0"/>
+              <a:buChar char="•"/>
+            </a:pPr>
+            <a:r>
+              <a:rPr lang="en-US" sz="1400" b="1">
+                <a:solidFill>
+                  <a:srgbClr val="00B050"/>
+                </a:solidFill>
+              </a:rPr>
+              <a:t>Ripple</a:t>
+            </a:r>
+            <a:r>
+              <a:rPr lang="en-US" sz="1400"/>
+              <a:t> supports tokens representing fiat currency, cryptocurrency, commodities, or other units of value such as frequent flier miles or mobile minutes</a:t>
+            </a:r>
+          </a:p>
+          <a:p>
+            <a:pPr marL="285750" indent="-285750">
+              <a:buFont typeface="Arial" panose="020B0604020202020204" pitchFamily="34" charset="0"/>
+              <a:buChar char="•"/>
+            </a:pPr>
+            <a:r>
+              <a:rPr lang="en-US" sz="1400" b="1">
+                <a:solidFill>
+                  <a:srgbClr val="00B050"/>
+                </a:solidFill>
+              </a:rPr>
+              <a:t>Ripple</a:t>
+            </a:r>
+            <a:r>
+              <a:rPr lang="en-US" sz="1400"/>
+              <a:t> purports to enable "secure, instantly and nearly free global financial transactions of any size with no chargebacks"</a:t>
+            </a:r>
+          </a:p>
+          <a:p>
+            <a:pPr marL="285750" indent="-285750">
+              <a:buFont typeface="Arial" panose="020B0604020202020204" pitchFamily="34" charset="0"/>
+              <a:buChar char="•"/>
+            </a:pPr>
+            <a:r>
+              <a:rPr lang="en-US" sz="1400" b="1">
+                <a:solidFill>
+                  <a:srgbClr val="00B050"/>
+                </a:solidFill>
+              </a:rPr>
+              <a:t>Ripple</a:t>
+            </a:r>
+            <a:r>
+              <a:rPr lang="en-US" sz="1400"/>
+              <a:t> was conceived by Jed McCaleb </a:t>
+            </a:r>
+          </a:p>
+          <a:p>
+            <a:pPr marL="285750" indent="-285750">
+              <a:buFont typeface="Arial" panose="020B0604020202020204" pitchFamily="34" charset="0"/>
+              <a:buChar char="•"/>
+            </a:pPr>
+            <a:r>
+              <a:rPr lang="en-US" sz="1400"/>
+              <a:t>Original authors:  </a:t>
+            </a:r>
+            <a:r>
+              <a:rPr lang="en-US" sz="1400" b="1">
+                <a:solidFill>
+                  <a:srgbClr val="00B050"/>
+                </a:solidFill>
+              </a:rPr>
+              <a:t>Arthur Britto, David Schwartz, Ryan Fugger</a:t>
+            </a:r>
+          </a:p>
+          <a:p>
+            <a:pPr marL="285750" indent="-285750">
+              <a:buFont typeface="Arial" panose="020B0604020202020204" pitchFamily="34" charset="0"/>
+              <a:buChar char="•"/>
+            </a:pPr>
+            <a:r>
+              <a:rPr lang="en-US" sz="1400"/>
+              <a:t>Developed by Ripple Labs Inc., initial release 2012, written in  C++</a:t>
+            </a:r>
+          </a:p>
+        </p:txBody>
+      </p:sp>
+      <p:sp>
+        <p:nvSpPr>
+          <p:cNvPr id="7" name="TextBox 6">
+            <a:extLst>
+              <a:ext uri="{FF2B5EF4-FFF2-40B4-BE49-F238E27FC236}">
+                <a16:creationId xmlns:a16="http://schemas.microsoft.com/office/drawing/2014/main" id="{D39FF3C4-289F-8C82-5F1A-2597B69EF113}"/>
+              </a:ext>
+            </a:extLst>
+          </p:cNvPr>
+          <p:cNvSpPr txBox="1"/>
+          <p:nvPr/>
+        </p:nvSpPr>
+        <p:spPr>
+          <a:xfrm>
+            <a:off x="6187951" y="6024443"/>
+            <a:ext cx="1800808" cy="738664"/>
+          </a:xfrm>
+          <a:prstGeom prst="rect">
+            <a:avLst/>
+          </a:prstGeom>
+          <a:noFill/>
+        </p:spPr>
+        <p:txBody>
+          <a:bodyPr wrap="square" rtlCol="0">
+            <a:spAutoFit/>
+          </a:bodyPr>
+          <a:lstStyle/>
+          <a:p>
+            <a:pPr algn="ctr"/>
+            <a:r>
+              <a:rPr lang="en-US" sz="1400"/>
+              <a:t>Jed McCaleb,</a:t>
+            </a:r>
+          </a:p>
+          <a:p>
+            <a:pPr algn="ctr"/>
+            <a:r>
+              <a:rPr lang="en-US" sz="1400"/>
+              <a:t>founder of Ripple, </a:t>
+            </a:r>
+            <a:br>
+              <a:rPr lang="en-US" sz="1400"/>
+            </a:br>
+            <a:r>
+              <a:rPr lang="en-US" sz="1400"/>
+              <a:t>co-founder of Stellar</a:t>
             </a:r>
           </a:p>
         </p:txBody>
       </p:sp>
       <p:pic>
         <p:nvPicPr>
-          <p:cNvPr id="4" name="Picture 3">
+          <p:cNvPr id="12" name="Picture 11">
             <a:extLst>
               <a:ext uri="{FF2B5EF4-FFF2-40B4-BE49-F238E27FC236}">
-                <a16:creationId xmlns:a16="http://schemas.microsoft.com/office/drawing/2014/main" id="{5D282DCE-4D06-3D4E-A1E4-19542DA67CA6}"/>
+                <a16:creationId xmlns:a16="http://schemas.microsoft.com/office/drawing/2014/main" id="{14026F5B-1D2F-723A-2E1D-4F67954CEC61}"/>
               </a:ext>
             </a:extLst>
           </p:cNvPr>
@@ -6216,7 +6433,7 @@
           <p:nvPr/>
         </p:nvPicPr>
         <p:blipFill>
-          <a:blip r:embed="rId4" cstate="email">
+          <a:blip r:embed="rId9" cstate="email">
             <a:extLst>
               <a:ext uri="{28A0092B-C50C-407E-A947-70E740481C1C}">
                 <a14:useLocalDpi xmlns:a14="http://schemas.microsoft.com/office/drawing/2010/main"/>
@@ -6229,8 +6446,8 @@
         </p:blipFill>
         <p:spPr>
           <a:xfrm>
-            <a:off x="2541308" y="161226"/>
-            <a:ext cx="1443357" cy="1355348"/>
+            <a:off x="9204557" y="23834"/>
+            <a:ext cx="2966528" cy="890560"/>
           </a:xfrm>
           <a:prstGeom prst="rect">
             <a:avLst/>
@@ -6239,10 +6456,10 @@
       </p:pic>
       <p:pic>
         <p:nvPicPr>
-          <p:cNvPr id="5" name="Picture 4">
+          <p:cNvPr id="13" name="Picture 12">
             <a:extLst>
               <a:ext uri="{FF2B5EF4-FFF2-40B4-BE49-F238E27FC236}">
-                <a16:creationId xmlns:a16="http://schemas.microsoft.com/office/drawing/2014/main" id="{43A3DE9F-6EE5-A747-B064-3CB275CD9991}"/>
+                <a16:creationId xmlns:a16="http://schemas.microsoft.com/office/drawing/2014/main" id="{8320B603-DE67-A95C-461D-E3E1E6F25081}"/>
               </a:ext>
             </a:extLst>
           </p:cNvPr>
@@ -6252,7 +6469,7 @@
           <p:nvPr/>
         </p:nvPicPr>
         <p:blipFill>
-          <a:blip r:embed="rId5" cstate="email">
+          <a:blip r:embed="rId10" cstate="email">
             <a:extLst>
               <a:ext uri="{28A0092B-C50C-407E-A947-70E740481C1C}">
                 <a14:useLocalDpi xmlns:a14="http://schemas.microsoft.com/office/drawing/2010/main"/>
@@ -6265,131 +6482,20 @@
         </p:blipFill>
         <p:spPr>
           <a:xfrm>
-            <a:off x="4152691" y="161226"/>
-            <a:ext cx="1811892" cy="2353377"/>
+            <a:off x="8778965" y="1033488"/>
+            <a:ext cx="3346406" cy="2857378"/>
           </a:xfrm>
           <a:prstGeom prst="rect">
             <a:avLst/>
           </a:prstGeom>
         </p:spPr>
       </p:pic>
-      <p:sp>
-        <p:nvSpPr>
-          <p:cNvPr id="9" name="TextBox 8">
-            <a:extLst>
-              <a:ext uri="{FF2B5EF4-FFF2-40B4-BE49-F238E27FC236}">
-                <a16:creationId xmlns:a16="http://schemas.microsoft.com/office/drawing/2014/main" id="{BE060BD8-457B-0F41-9E84-E2B164D8C94E}"/>
-              </a:ext>
-            </a:extLst>
-          </p:cNvPr>
-          <p:cNvSpPr txBox="1"/>
-          <p:nvPr/>
-        </p:nvSpPr>
-        <p:spPr>
-          <a:xfrm>
-            <a:off x="3865113" y="2514603"/>
-            <a:ext cx="2310064" cy="738664"/>
-          </a:xfrm>
-          <a:prstGeom prst="rect">
-            <a:avLst/>
-          </a:prstGeom>
-          <a:noFill/>
-        </p:spPr>
-        <p:txBody>
-          <a:bodyPr wrap="square" rtlCol="0">
-            <a:spAutoFit/>
-          </a:bodyPr>
-          <a:lstStyle/>
-          <a:p>
-            <a:pPr algn="ctr"/>
-            <a:r>
-              <a:rPr lang="en-US" sz="1400"/>
-              <a:t> </a:t>
-            </a:r>
-            <a:r>
-              <a:rPr lang="en-US" sz="1400" b="1">
-                <a:solidFill>
-                  <a:srgbClr val="0070C0"/>
-                </a:solidFill>
-              </a:rPr>
-              <a:t>Joseph Lubin</a:t>
-            </a:r>
-            <a:endParaRPr lang="en-US" sz="1400"/>
-          </a:p>
-          <a:p>
-            <a:pPr algn="ctr"/>
-            <a:r>
-              <a:rPr lang="en-US" sz="1400"/>
-              <a:t>ConsenSys</a:t>
-            </a:r>
-          </a:p>
-          <a:p>
-            <a:pPr algn="ctr"/>
-            <a:r>
-              <a:rPr lang="en-US" sz="1400"/>
-              <a:t>Brooklyn, New York</a:t>
-            </a:r>
-          </a:p>
-        </p:txBody>
-      </p:sp>
       <p:pic>
         <p:nvPicPr>
-          <p:cNvPr id="1032" name="Picture 8" descr="MetaMask – Get this Extension for 🦊 Firefox (en-US)">
+          <p:cNvPr id="14" name="Picture 13">
             <a:extLst>
               <a:ext uri="{FF2B5EF4-FFF2-40B4-BE49-F238E27FC236}">
-                <a16:creationId xmlns:a16="http://schemas.microsoft.com/office/drawing/2014/main" id="{2D8924E9-3506-C949-A240-5CF490D28C07}"/>
-              </a:ext>
-            </a:extLst>
-          </p:cNvPr>
-          <p:cNvPicPr>
-            <a:picLocks noChangeAspect="1" noChangeArrowheads="1"/>
-          </p:cNvPicPr>
-          <p:nvPr/>
-        </p:nvPicPr>
-        <p:blipFill>
-          <a:blip r:embed="rId6" cstate="email">
-            <a:extLst>
-              <a:ext uri="{28A0092B-C50C-407E-A947-70E740481C1C}">
-                <a14:useLocalDpi xmlns:a14="http://schemas.microsoft.com/office/drawing/2010/main"/>
-              </a:ext>
-            </a:extLst>
-          </a:blip>
-          <a:srcRect/>
-          <a:stretch>
-            <a:fillRect/>
-          </a:stretch>
-        </p:blipFill>
-        <p:spPr bwMode="auto">
-          <a:xfrm>
-            <a:off x="98297" y="1758016"/>
-            <a:ext cx="3766817" cy="2353377"/>
-          </a:xfrm>
-          <a:prstGeom prst="rect">
-            <a:avLst/>
-          </a:prstGeom>
-          <a:noFill/>
-          <a:ln>
-            <a:solidFill>
-              <a:schemeClr val="accent1"/>
-            </a:solidFill>
-          </a:ln>
-          <a:extLst>
-            <a:ext uri="{909E8E84-426E-40DD-AFC4-6F175D3DCCD1}">
-              <a14:hiddenFill xmlns:a14="http://schemas.microsoft.com/office/drawing/2010/main">
-                <a:solidFill>
-                  <a:srgbClr val="FFFFFF"/>
-                </a:solidFill>
-              </a14:hiddenFill>
-            </a:ext>
-          </a:extLst>
-        </p:spPr>
-      </p:pic>
-      <p:pic>
-        <p:nvPicPr>
-          <p:cNvPr id="6" name="Picture 5">
-            <a:extLst>
-              <a:ext uri="{FF2B5EF4-FFF2-40B4-BE49-F238E27FC236}">
-                <a16:creationId xmlns:a16="http://schemas.microsoft.com/office/drawing/2014/main" id="{DA629FB8-3D9E-CA44-9067-60F4B592AA53}"/>
+                <a16:creationId xmlns:a16="http://schemas.microsoft.com/office/drawing/2014/main" id="{98D02EFD-26FB-D446-EC0A-104614A78278}"/>
               </a:ext>
             </a:extLst>
           </p:cNvPr>
@@ -6399,7 +6505,7 @@
           <p:nvPr/>
         </p:nvPicPr>
         <p:blipFill>
-          <a:blip r:embed="rId7" cstate="email">
+          <a:blip r:embed="rId11" cstate="email">
             <a:extLst>
               <a:ext uri="{28A0092B-C50C-407E-A947-70E740481C1C}">
                 <a14:useLocalDpi xmlns:a14="http://schemas.microsoft.com/office/drawing/2010/main"/>
@@ -6412,20 +6518,56 @@
         </p:blipFill>
         <p:spPr>
           <a:xfrm>
-            <a:off x="134536" y="4481654"/>
-            <a:ext cx="3645952" cy="2106441"/>
+            <a:off x="6607300" y="4712196"/>
+            <a:ext cx="962111" cy="1312247"/>
           </a:xfrm>
           <a:prstGeom prst="rect">
             <a:avLst/>
           </a:prstGeom>
         </p:spPr>
       </p:pic>
-      <p:sp>
-        <p:nvSpPr>
-          <p:cNvPr id="7" name="TextBox 6">
+      <p:pic>
+        <p:nvPicPr>
+          <p:cNvPr id="15" name="Picture 14">
             <a:extLst>
               <a:ext uri="{FF2B5EF4-FFF2-40B4-BE49-F238E27FC236}">
-                <a16:creationId xmlns:a16="http://schemas.microsoft.com/office/drawing/2014/main" id="{EF72CAD9-D640-5044-99D2-CF1C8DF2F0A2}"/>
+                <a16:creationId xmlns:a16="http://schemas.microsoft.com/office/drawing/2014/main" id="{ADB0F7C2-1ACC-8292-966A-4333B0867272}"/>
+              </a:ext>
+            </a:extLst>
+          </p:cNvPr>
+          <p:cNvPicPr>
+            <a:picLocks noChangeAspect="1"/>
+          </p:cNvPicPr>
+          <p:nvPr/>
+        </p:nvPicPr>
+        <p:blipFill>
+          <a:blip r:embed="rId12" cstate="email">
+            <a:extLst>
+              <a:ext uri="{28A0092B-C50C-407E-A947-70E740481C1C}">
+                <a14:useLocalDpi xmlns:a14="http://schemas.microsoft.com/office/drawing/2010/main"/>
+              </a:ext>
+            </a:extLst>
+          </a:blip>
+          <a:stretch>
+            <a:fillRect/>
+          </a:stretch>
+        </p:blipFill>
+        <p:spPr>
+          <a:xfrm>
+            <a:off x="8036635" y="4706753"/>
+            <a:ext cx="964349" cy="1312247"/>
+          </a:xfrm>
+          <a:prstGeom prst="rect">
+            <a:avLst/>
+          </a:prstGeom>
+        </p:spPr>
+      </p:pic>
+      <p:sp>
+        <p:nvSpPr>
+          <p:cNvPr id="16" name="TextBox 15">
+            <a:extLst>
+              <a:ext uri="{FF2B5EF4-FFF2-40B4-BE49-F238E27FC236}">
+                <a16:creationId xmlns:a16="http://schemas.microsoft.com/office/drawing/2014/main" id="{E46198B3-FD8B-E671-C836-59F3797969C1}"/>
               </a:ext>
             </a:extLst>
           </p:cNvPr>
@@ -6434,8 +6576,8 @@
         </p:nvSpPr>
         <p:spPr>
           <a:xfrm>
-            <a:off x="10738" y="588610"/>
-            <a:ext cx="2462023" cy="523220"/>
+            <a:off x="7703827" y="6000789"/>
+            <a:ext cx="1627726" cy="523220"/>
           </a:xfrm>
           <a:prstGeom prst="rect">
             <a:avLst/>
@@ -6448,21 +6590,219 @@
           </a:bodyPr>
           <a:lstStyle/>
           <a:p>
-            <a:r>
-              <a:rPr lang="en-US" sz="1400" b="1">
-                <a:solidFill>
-                  <a:srgbClr val="00B050"/>
-                </a:solidFill>
-              </a:rPr>
-              <a:t>A software cryptocurrency wallet for Etherium blockchain</a:t>
-            </a:r>
-          </a:p>
-        </p:txBody>
-      </p:sp>
+            <a:pPr algn="ctr"/>
+            <a:r>
+              <a:rPr lang="en-US" sz="1400"/>
+              <a:t>Arthur Britto</a:t>
+            </a:r>
+          </a:p>
+          <a:p>
+            <a:pPr algn="ctr"/>
+            <a:r>
+              <a:rPr lang="en-US" sz="1400"/>
+              <a:t>founder of Ripple </a:t>
+            </a:r>
+          </a:p>
+        </p:txBody>
+      </p:sp>
+      <p:pic>
+        <p:nvPicPr>
+          <p:cNvPr id="23" name="Picture 22">
+            <a:extLst>
+              <a:ext uri="{FF2B5EF4-FFF2-40B4-BE49-F238E27FC236}">
+                <a16:creationId xmlns:a16="http://schemas.microsoft.com/office/drawing/2014/main" id="{9B729C8D-2426-7368-9AD6-F84C9325EA1D}"/>
+              </a:ext>
+            </a:extLst>
+          </p:cNvPr>
+          <p:cNvPicPr>
+            <a:picLocks noChangeAspect="1"/>
+          </p:cNvPicPr>
+          <p:nvPr/>
+        </p:nvPicPr>
+        <p:blipFill>
+          <a:blip r:embed="rId13" cstate="email">
+            <a:extLst>
+              <a:ext uri="{28A0092B-C50C-407E-A947-70E740481C1C}">
+                <a14:useLocalDpi xmlns:a14="http://schemas.microsoft.com/office/drawing/2010/main"/>
+              </a:ext>
+            </a:extLst>
+          </a:blip>
+          <a:stretch>
+            <a:fillRect/>
+          </a:stretch>
+        </p:blipFill>
+        <p:spPr>
+          <a:xfrm>
+            <a:off x="9484376" y="4737594"/>
+            <a:ext cx="962111" cy="1263195"/>
+          </a:xfrm>
+          <a:prstGeom prst="rect">
+            <a:avLst/>
+          </a:prstGeom>
+        </p:spPr>
+      </p:pic>
+      <p:sp>
+        <p:nvSpPr>
+          <p:cNvPr id="28" name="TextBox 27">
+            <a:extLst>
+              <a:ext uri="{FF2B5EF4-FFF2-40B4-BE49-F238E27FC236}">
+                <a16:creationId xmlns:a16="http://schemas.microsoft.com/office/drawing/2014/main" id="{EA7ECA15-94C9-7BCD-F883-F8C1A2A3F8D2}"/>
+              </a:ext>
+            </a:extLst>
+          </p:cNvPr>
+          <p:cNvSpPr txBox="1"/>
+          <p:nvPr/>
+        </p:nvSpPr>
+        <p:spPr>
+          <a:xfrm>
+            <a:off x="9267703" y="6000789"/>
+            <a:ext cx="1395455" cy="523220"/>
+          </a:xfrm>
+          <a:prstGeom prst="rect">
+            <a:avLst/>
+          </a:prstGeom>
+          <a:noFill/>
+        </p:spPr>
+        <p:txBody>
+          <a:bodyPr wrap="square" rtlCol="0">
+            <a:spAutoFit/>
+          </a:bodyPr>
+          <a:lstStyle/>
+          <a:p>
+            <a:pPr algn="ctr"/>
+            <a:r>
+              <a:rPr lang="en-US" sz="1400"/>
+              <a:t>David Schwartz</a:t>
+            </a:r>
+          </a:p>
+          <a:p>
+            <a:pPr algn="ctr"/>
+            <a:r>
+              <a:rPr lang="en-US" sz="1400"/>
+              <a:t>CTO of Ripple </a:t>
+            </a:r>
+          </a:p>
+        </p:txBody>
+      </p:sp>
+      <p:pic>
+        <p:nvPicPr>
+          <p:cNvPr id="24" name="Picture 23">
+            <a:extLst>
+              <a:ext uri="{FF2B5EF4-FFF2-40B4-BE49-F238E27FC236}">
+                <a16:creationId xmlns:a16="http://schemas.microsoft.com/office/drawing/2014/main" id="{261EE87F-7204-1A22-BE4E-EBBF5BF7A499}"/>
+              </a:ext>
+            </a:extLst>
+          </p:cNvPr>
+          <p:cNvPicPr>
+            <a:picLocks noChangeAspect="1"/>
+          </p:cNvPicPr>
+          <p:nvPr/>
+        </p:nvPicPr>
+        <p:blipFill>
+          <a:blip r:embed="rId14" cstate="email">
+            <a:extLst>
+              <a:ext uri="{28A0092B-C50C-407E-A947-70E740481C1C}">
+                <a14:useLocalDpi xmlns:a14="http://schemas.microsoft.com/office/drawing/2010/main"/>
+              </a:ext>
+            </a:extLst>
+          </a:blip>
+          <a:stretch>
+            <a:fillRect/>
+          </a:stretch>
+        </p:blipFill>
+        <p:spPr>
+          <a:xfrm>
+            <a:off x="10929877" y="4743037"/>
+            <a:ext cx="1068992" cy="1247158"/>
+          </a:xfrm>
+          <a:prstGeom prst="rect">
+            <a:avLst/>
+          </a:prstGeom>
+        </p:spPr>
+      </p:pic>
+      <p:sp>
+        <p:nvSpPr>
+          <p:cNvPr id="30" name="TextBox 29">
+            <a:extLst>
+              <a:ext uri="{FF2B5EF4-FFF2-40B4-BE49-F238E27FC236}">
+                <a16:creationId xmlns:a16="http://schemas.microsoft.com/office/drawing/2014/main" id="{B046C6C3-0515-CFB5-A3C4-252EA181EB87}"/>
+              </a:ext>
+            </a:extLst>
+          </p:cNvPr>
+          <p:cNvSpPr txBox="1"/>
+          <p:nvPr/>
+        </p:nvSpPr>
+        <p:spPr>
+          <a:xfrm>
+            <a:off x="10741792" y="6006232"/>
+            <a:ext cx="1448896" cy="523220"/>
+          </a:xfrm>
+          <a:prstGeom prst="rect">
+            <a:avLst/>
+          </a:prstGeom>
+          <a:noFill/>
+        </p:spPr>
+        <p:txBody>
+          <a:bodyPr wrap="square" rtlCol="0">
+            <a:spAutoFit/>
+          </a:bodyPr>
+          <a:lstStyle/>
+          <a:p>
+            <a:pPr algn="ctr"/>
+            <a:r>
+              <a:rPr lang="en-US" sz="1400"/>
+              <a:t>Ryan Fugger</a:t>
+            </a:r>
+          </a:p>
+          <a:p>
+            <a:pPr algn="ctr"/>
+            <a:r>
+              <a:rPr lang="en-US" sz="1400"/>
+              <a:t>early consultant</a:t>
+            </a:r>
+          </a:p>
+        </p:txBody>
+      </p:sp>
+      <p:pic>
+        <p:nvPicPr>
+          <p:cNvPr id="25" name="Picture 24">
+            <a:extLst>
+              <a:ext uri="{FF2B5EF4-FFF2-40B4-BE49-F238E27FC236}">
+                <a16:creationId xmlns:a16="http://schemas.microsoft.com/office/drawing/2014/main" id="{3AF74DF2-61DB-4932-3ED3-A9DD89002B46}"/>
+              </a:ext>
+            </a:extLst>
+          </p:cNvPr>
+          <p:cNvPicPr>
+            <a:picLocks noChangeAspect="1"/>
+          </p:cNvPicPr>
+          <p:nvPr/>
+        </p:nvPicPr>
+        <p:blipFill>
+          <a:blip r:embed="rId15" cstate="email">
+            <a:extLst>
+              <a:ext uri="{28A0092B-C50C-407E-A947-70E740481C1C}">
+                <a14:useLocalDpi xmlns:a14="http://schemas.microsoft.com/office/drawing/2010/main"/>
+              </a:ext>
+            </a:extLst>
+          </a:blip>
+          <a:stretch>
+            <a:fillRect/>
+          </a:stretch>
+        </p:blipFill>
+        <p:spPr>
+          <a:xfrm>
+            <a:off x="7142972" y="89548"/>
+            <a:ext cx="1309401" cy="1312248"/>
+          </a:xfrm>
+          <a:prstGeom prst="rect">
+            <a:avLst/>
+          </a:prstGeom>
+        </p:spPr>
+      </p:pic>
     </p:spTree>
     <p:extLst>
       <p:ext uri="{BB962C8B-B14F-4D97-AF65-F5344CB8AC3E}">
-        <p14:creationId xmlns:p14="http://schemas.microsoft.com/office/powerpoint/2010/main" val="3657471056"/>
+        <p14:creationId xmlns:p14="http://schemas.microsoft.com/office/powerpoint/2010/main" val="2122812399"/>
       </p:ext>
     </p:extLst>
   </p:cSld>
@@ -6494,7 +6834,7 @@
           <p:cNvPr id="2" name="TextBox 1">
             <a:extLst>
               <a:ext uri="{FF2B5EF4-FFF2-40B4-BE49-F238E27FC236}">
-                <a16:creationId xmlns:a16="http://schemas.microsoft.com/office/drawing/2014/main" id="{891D3C3A-6600-6447-9C42-BB332A743826}"/>
+                <a16:creationId xmlns:a16="http://schemas.microsoft.com/office/drawing/2014/main" id="{E7110EDD-1316-6D4C-4930-BCFF121273CA}"/>
               </a:ext>
             </a:extLst>
           </p:cNvPr>
@@ -6503,8 +6843,8 @@
         </p:nvSpPr>
         <p:spPr>
           <a:xfrm>
-            <a:off x="1" y="120415"/>
-            <a:ext cx="3769360" cy="523220"/>
+            <a:off x="0" y="0"/>
+            <a:ext cx="3447536" cy="523220"/>
           </a:xfrm>
           <a:prstGeom prst="rect">
             <a:avLst/>
@@ -6519,17 +6859,17 @@
           <a:p>
             <a:r>
               <a:rPr lang="en-US" sz="2800" b="1"/>
-              <a:t>Best Hardware Wallet</a:t>
-            </a:r>
-          </a:p>
-        </p:txBody>
-      </p:sp>
-      <p:sp>
-        <p:nvSpPr>
-          <p:cNvPr id="3" name="TextBox 2">
+              <a:t>Stellar &amp; Interstellar</a:t>
+            </a:r>
+          </a:p>
+        </p:txBody>
+      </p:sp>
+      <p:sp>
+        <p:nvSpPr>
+          <p:cNvPr id="4" name="TextBox 3">
             <a:extLst>
               <a:ext uri="{FF2B5EF4-FFF2-40B4-BE49-F238E27FC236}">
-                <a16:creationId xmlns:a16="http://schemas.microsoft.com/office/drawing/2014/main" id="{E0AB3421-15B2-F64D-B4D9-A2655D111DC8}"/>
+                <a16:creationId xmlns:a16="http://schemas.microsoft.com/office/drawing/2014/main" id="{D450E834-9C35-33AB-8443-28E59C3504FF}"/>
               </a:ext>
             </a:extLst>
           </p:cNvPr>
@@ -6538,8 +6878,8 @@
         </p:nvSpPr>
         <p:spPr>
           <a:xfrm>
-            <a:off x="3971716" y="1717899"/>
-            <a:ext cx="4248567" cy="2893100"/>
+            <a:off x="0" y="509286"/>
+            <a:ext cx="6643868" cy="2031325"/>
           </a:xfrm>
           <a:prstGeom prst="rect">
             <a:avLst/>
@@ -6552,132 +6892,435 @@
           </a:bodyPr>
           <a:lstStyle/>
           <a:p>
-            <a:pPr marL="380990" indent="-380990">
-              <a:buFont typeface="Arial" panose="020B0604020202020204" pitchFamily="34" charset="0"/>
-              <a:buChar char="•"/>
-            </a:pPr>
-            <a:r>
-              <a:rPr lang="en-US" sz="1400"/>
-              <a:t>Ledger Noan X - </a:t>
+            <a:pPr marL="285750" indent="-285750">
+              <a:buFont typeface="Arial" panose="020B0604020202020204" pitchFamily="34" charset="0"/>
+              <a:buChar char="•"/>
+            </a:pPr>
+            <a:r>
+              <a:rPr lang="en-US" sz="1400"/>
+              <a:t>Open source payment protocol:</a:t>
+            </a:r>
+            <a:br>
+              <a:rPr lang="en-US" sz="1400"/>
+            </a:br>
+            <a:r>
+              <a:rPr lang="en-US" sz="1400"/>
+              <a:t>.. </a:t>
             </a:r>
             <a:r>
               <a:rPr lang="en-US" sz="1400">
                 <a:hlinkClick r:id="rId2"/>
               </a:rPr>
-              <a:t>https://www.ledger.com</a:t>
-            </a:r>
-            <a:r>
-              <a:rPr lang="en-US" sz="1400"/>
-              <a:t> –</a:t>
+              <a:t>https://www.stellar.org</a:t>
+            </a:r>
+            <a:r>
+              <a:rPr lang="en-US" sz="1400"/>
+              <a:t> </a:t>
             </a:r>
             <a:br>
               <a:rPr lang="en-US" sz="1400"/>
             </a:br>
-            <a:br>
-              <a:rPr lang="en-US" sz="1400"/>
-            </a:br>
-            <a:r>
-              <a:rPr lang="en-US" sz="1400"/>
-              <a:t> </a:t>
-            </a:r>
-          </a:p>
-          <a:p>
-            <a:endParaRPr lang="en-US" sz="1400"/>
-          </a:p>
-          <a:p>
-            <a:pPr marL="380990" indent="-380990">
-              <a:buFont typeface="Arial" panose="020B0604020202020204" pitchFamily="34" charset="0"/>
-              <a:buChar char="•"/>
-            </a:pPr>
-            <a:r>
-              <a:rPr lang="en-US" sz="1400"/>
-              <a:t>Trezor - </a:t>
+            <a:r>
+              <a:rPr lang="en-US" sz="1400"/>
+              <a:t>.. </a:t>
             </a:r>
             <a:r>
               <a:rPr lang="en-US" sz="1400">
                 <a:hlinkClick r:id="rId3"/>
               </a:rPr>
-              <a:t>https://trezor.io</a:t>
-            </a:r>
-            <a:r>
-              <a:rPr lang="en-US" sz="1400"/>
-              <a:t> – </a:t>
-            </a:r>
-          </a:p>
-          <a:p>
-            <a:endParaRPr lang="en-US" sz="1400"/>
-          </a:p>
-          <a:p>
-            <a:endParaRPr lang="en-US" sz="1400"/>
-          </a:p>
-          <a:p>
-            <a:endParaRPr lang="en-US" sz="1400"/>
-          </a:p>
-          <a:p>
-            <a:pPr marL="380990" indent="-380990">
-              <a:buFont typeface="Arial" panose="020B0604020202020204" pitchFamily="34" charset="0"/>
-              <a:buChar char="•"/>
-            </a:pPr>
-            <a:r>
-              <a:rPr lang="en-US" sz="1400"/>
-              <a:t>Arculus - </a:t>
+              <a:t>https://www.stellar.org/learn/intro-to-stellar</a:t>
+            </a:r>
+            <a:r>
+              <a:rPr lang="en-US" sz="1400"/>
+              <a:t> </a:t>
+            </a:r>
+            <a:br>
+              <a:rPr lang="en-US" sz="1400"/>
+            </a:br>
+            <a:r>
+              <a:rPr lang="en-US" sz="1400"/>
+              <a:t>.. </a:t>
             </a:r>
             <a:r>
               <a:rPr lang="en-US" sz="1400">
                 <a:hlinkClick r:id="rId4"/>
               </a:rPr>
-              <a:t>https://www.getarculus.com</a:t>
-            </a:r>
-            <a:r>
-              <a:rPr lang="en-US" sz="1400"/>
-              <a:t> – </a:t>
-            </a:r>
-          </a:p>
-          <a:p>
-            <a:pPr marL="380990" indent="-380990">
-              <a:buFont typeface="Arial" panose="020B0604020202020204" pitchFamily="34" charset="0"/>
-              <a:buChar char="•"/>
-            </a:pPr>
-            <a:endParaRPr lang="en-US" sz="1400"/>
-          </a:p>
-          <a:p>
-            <a:pPr marL="380990" indent="-380990">
-              <a:buFont typeface="Arial" panose="020B0604020202020204" pitchFamily="34" charset="0"/>
-              <a:buChar char="•"/>
-            </a:pPr>
-            <a:endParaRPr lang="en-US" sz="1400"/>
-          </a:p>
-          <a:p>
-            <a:endParaRPr lang="en-US" sz="1400"/>
-          </a:p>
-          <a:p>
-            <a:pPr marL="380990" indent="-380990">
-              <a:buFont typeface="Arial" panose="020B0604020202020204" pitchFamily="34" charset="0"/>
-              <a:buChar char="•"/>
-            </a:pPr>
-            <a:r>
-              <a:rPr lang="en-US" sz="1400"/>
-              <a:t>SafePal - </a:t>
+              <a:t>https://www.youtube.com/watch?v=-u2RCOWxKww</a:t>
+            </a:r>
+            <a:r>
+              <a:rPr lang="en-US" sz="1400"/>
+              <a:t> – good short video</a:t>
+            </a:r>
+            <a:br>
+              <a:rPr lang="en-US" sz="1400"/>
+            </a:br>
+            <a:r>
+              <a:rPr lang="en-US" sz="1400"/>
+              <a:t>.. </a:t>
             </a:r>
             <a:r>
               <a:rPr lang="en-US" sz="1400">
                 <a:hlinkClick r:id="rId5"/>
               </a:rPr>
-              <a:t>https://safepal.io</a:t>
-            </a:r>
-            <a:r>
-              <a:rPr lang="en-US" sz="1400"/>
-              <a:t> - </a:t>
+              <a:t>https://github.com/stellar/stellar-core</a:t>
+            </a:r>
+            <a:r>
+              <a:rPr lang="en-US" sz="1400"/>
+              <a:t> </a:t>
+            </a:r>
+            <a:br>
+              <a:rPr lang="en-US" sz="1400"/>
+            </a:br>
+            <a:r>
+              <a:rPr lang="en-US" sz="1400"/>
+              <a:t>.. </a:t>
+            </a:r>
+            <a:r>
+              <a:rPr lang="en-US" sz="1400">
+                <a:hlinkClick r:id="rId6"/>
+              </a:rPr>
+              <a:t>https://developers.stellar.org/docs/software-and-sdks/</a:t>
+            </a:r>
+            <a:r>
+              <a:rPr lang="en-US" sz="1400"/>
+              <a:t> </a:t>
+            </a:r>
+            <a:br>
+              <a:rPr lang="en-US" sz="1400"/>
+            </a:br>
+            <a:r>
+              <a:rPr lang="en-US" sz="1400"/>
+              <a:t>.. </a:t>
+            </a:r>
+            <a:r>
+              <a:rPr lang="en-US" sz="1400">
+                <a:hlinkClick r:id="rId7"/>
+              </a:rPr>
+              <a:t>https://github.com/StellarCN/py-stellar-base/tree/master/examples</a:t>
+            </a:r>
+            <a:r>
+              <a:rPr lang="en-US" sz="1400"/>
+              <a:t> </a:t>
+            </a:r>
+            <a:br>
+              <a:rPr lang="en-US" sz="1400"/>
+            </a:br>
+            <a:r>
+              <a:rPr lang="en-US" sz="1400"/>
+              <a:t>.. </a:t>
+            </a:r>
+            <a:r>
+              <a:rPr lang="en-US" sz="1400">
+                <a:hlinkClick r:id="rId8"/>
+              </a:rPr>
+              <a:t>https://en.wikipedia.org/wiki/Stellar_(payment_network)</a:t>
+            </a:r>
+            <a:endParaRPr lang="en-US" sz="1400"/>
+          </a:p>
+          <a:p>
+            <a:pPr marL="285750" indent="-285750">
+              <a:buFont typeface="Arial" panose="020B0604020202020204" pitchFamily="34" charset="0"/>
+              <a:buChar char="•"/>
+            </a:pPr>
+            <a:r>
+              <a:rPr lang="en-US" sz="1400"/>
+              <a:t>.. </a:t>
+            </a:r>
+            <a:r>
+              <a:rPr lang="en-US" sz="1400">
+                <a:hlinkClick r:id="rId9"/>
+              </a:rPr>
+              <a:t>https://interstellar.com</a:t>
+            </a:r>
+            <a:r>
+              <a:rPr lang="en-US" sz="1400"/>
+              <a:t> - Company </a:t>
+            </a:r>
+            <a:r>
+              <a:rPr lang="en-US" sz="1400" b="1">
+                <a:solidFill>
+                  <a:srgbClr val="00B050"/>
+                </a:solidFill>
+              </a:rPr>
+              <a:t>Interstellar</a:t>
+            </a:r>
+            <a:endParaRPr lang="en-US" sz="1400"/>
+          </a:p>
+        </p:txBody>
+      </p:sp>
+      <p:sp>
+        <p:nvSpPr>
+          <p:cNvPr id="5" name="TextBox 4">
+            <a:extLst>
+              <a:ext uri="{FF2B5EF4-FFF2-40B4-BE49-F238E27FC236}">
+                <a16:creationId xmlns:a16="http://schemas.microsoft.com/office/drawing/2014/main" id="{98ACFF17-6F73-7014-B5A1-972FD9DD09A1}"/>
+              </a:ext>
+            </a:extLst>
+          </p:cNvPr>
+          <p:cNvSpPr txBox="1"/>
+          <p:nvPr/>
+        </p:nvSpPr>
+        <p:spPr>
+          <a:xfrm>
+            <a:off x="0" y="2681429"/>
+            <a:ext cx="7331138" cy="3970318"/>
+          </a:xfrm>
+          <a:prstGeom prst="rect">
+            <a:avLst/>
+          </a:prstGeom>
+          <a:noFill/>
+        </p:spPr>
+        <p:txBody>
+          <a:bodyPr wrap="square" rtlCol="0">
+            <a:spAutoFit/>
+          </a:bodyPr>
+          <a:lstStyle/>
+          <a:p>
+            <a:pPr marL="285750" indent="-285750">
+              <a:buFont typeface="Arial" panose="020B0604020202020204" pitchFamily="34" charset="0"/>
+              <a:buChar char="•"/>
+            </a:pPr>
+            <a:r>
+              <a:rPr lang="en-US" sz="1400" b="1">
+                <a:solidFill>
+                  <a:srgbClr val="00B050"/>
+                </a:solidFill>
+              </a:rPr>
+              <a:t>Stellar</a:t>
+            </a:r>
+            <a:r>
+              <a:rPr lang="en-US" sz="1400"/>
+              <a:t>, or </a:t>
+            </a:r>
+            <a:r>
+              <a:rPr lang="en-US" sz="1400" b="1">
+                <a:solidFill>
+                  <a:srgbClr val="00B050"/>
+                </a:solidFill>
+              </a:rPr>
+              <a:t>Stellar Lumens tokens (XLM, 50 Bln in circulation)</a:t>
+            </a:r>
+            <a:r>
+              <a:rPr lang="en-US" sz="1400"/>
+              <a:t> is an open source (Apache), decentralized protocol (exchange) for digital currency to fiat money low-cost transfers, which allows cross-border transactions between any pair of currencies. You can create coins around anything (tokenize). Works like stable coins.</a:t>
+            </a:r>
+          </a:p>
+          <a:p>
+            <a:pPr marL="285750" indent="-285750">
+              <a:buFont typeface="Arial" panose="020B0604020202020204" pitchFamily="34" charset="0"/>
+              <a:buChar char="•"/>
+            </a:pPr>
+            <a:r>
+              <a:rPr lang="en-US" sz="1400" b="1">
+                <a:solidFill>
+                  <a:srgbClr val="00B050"/>
+                </a:solidFill>
+              </a:rPr>
+              <a:t>Stellar</a:t>
+            </a:r>
+            <a:r>
+              <a:rPr lang="en-US" sz="1400"/>
+              <a:t> is a decentralized exchange for crypto, forex, or securities. Users can swap between tokens using simple functions built into the protocol</a:t>
+            </a:r>
+          </a:p>
+          <a:p>
+            <a:pPr marL="285750" indent="-285750">
+              <a:buFont typeface="Arial" panose="020B0604020202020204" pitchFamily="34" charset="0"/>
+              <a:buChar char="•"/>
+            </a:pPr>
+            <a:r>
+              <a:rPr lang="en-US" sz="1400"/>
+              <a:t>Stellar is a global public blockchain, a non-stock, non-profit corporation with no shareholders, no owners and no profit motive</a:t>
+            </a:r>
+          </a:p>
+          <a:p>
+            <a:pPr marL="285750" indent="-285750">
+              <a:buFont typeface="Arial" panose="020B0604020202020204" pitchFamily="34" charset="0"/>
+              <a:buChar char="•"/>
+            </a:pPr>
+            <a:r>
+              <a:rPr lang="en-US" sz="1400"/>
+              <a:t>In 2020 - over 4.8 million users and ~ 1 Bln transactions</a:t>
+            </a:r>
+          </a:p>
+          <a:p>
+            <a:pPr marL="285750" indent="-285750">
+              <a:buFont typeface="Arial" panose="020B0604020202020204" pitchFamily="34" charset="0"/>
+              <a:buChar char="•"/>
+            </a:pPr>
+            <a:r>
+              <a:rPr lang="en-US" sz="1400"/>
+              <a:t>Release in 2014, original authors: Jed McCaleb; Joyce Kim</a:t>
+            </a:r>
+          </a:p>
+          <a:p>
+            <a:pPr marL="285750" indent="-285750">
+              <a:buFont typeface="Arial" panose="020B0604020202020204" pitchFamily="34" charset="0"/>
+              <a:buChar char="•"/>
+            </a:pPr>
+            <a:r>
+              <a:rPr lang="en-US" sz="1400"/>
+              <a:t>Written in: C++, Go, Java, JavaScript, Python, Ruby</a:t>
+            </a:r>
+          </a:p>
+          <a:p>
+            <a:pPr marL="285750" indent="-285750">
+              <a:buFont typeface="Arial" panose="020B0604020202020204" pitchFamily="34" charset="0"/>
+              <a:buChar char="•"/>
+            </a:pPr>
+            <a:r>
+              <a:rPr lang="en-US" sz="1400"/>
+              <a:t>Fast: 3 to 5-second settlements</a:t>
+            </a:r>
+          </a:p>
+          <a:p>
+            <a:pPr marL="285750" indent="-285750">
+              <a:buFont typeface="Arial" panose="020B0604020202020204" pitchFamily="34" charset="0"/>
+              <a:buChar char="•"/>
+            </a:pPr>
+            <a:r>
+              <a:rPr lang="en-US" sz="1400"/>
+              <a:t>Cheap: virtually no transaction fees ($1 for 100,000 transactions)</a:t>
+            </a:r>
+          </a:p>
+          <a:p>
+            <a:pPr marL="285750" indent="-285750">
+              <a:buFont typeface="Arial" panose="020B0604020202020204" pitchFamily="34" charset="0"/>
+              <a:buChar char="•"/>
+            </a:pPr>
+            <a:r>
+              <a:rPr lang="en-US" sz="1400"/>
+              <a:t>Scalable: process thousands of transactions per second</a:t>
+            </a:r>
+          </a:p>
+          <a:p>
+            <a:pPr marL="285750" indent="-285750">
+              <a:buFont typeface="Arial" panose="020B0604020202020204" pitchFamily="34" charset="0"/>
+              <a:buChar char="•"/>
+            </a:pPr>
+            <a:r>
+              <a:rPr lang="en-US" sz="1400"/>
+              <a:t>Compliant: built-in compliance layer and licensed partners</a:t>
+            </a:r>
+          </a:p>
+          <a:p>
+            <a:pPr marL="285750" indent="-285750">
+              <a:buFont typeface="Arial" panose="020B0604020202020204" pitchFamily="34" charset="0"/>
+              <a:buChar char="•"/>
+            </a:pPr>
+            <a:r>
+              <a:rPr lang="en-US" sz="1400"/>
+              <a:t>Secure: built-in security, best-in-class cryptographic techniques, and secure against 51% attacks</a:t>
+            </a:r>
+          </a:p>
+          <a:p>
+            <a:pPr marL="285750" indent="-285750">
+              <a:buFont typeface="Arial" panose="020B0604020202020204" pitchFamily="34" charset="0"/>
+              <a:buChar char="•"/>
+            </a:pPr>
+            <a:r>
+              <a:rPr lang="en-US" sz="1400"/>
+              <a:t>Sustainable: green decentralization of the StellarConsensus protocol (</a:t>
+            </a:r>
+            <a:r>
+              <a:rPr lang="en-US" sz="1400" b="1">
+                <a:solidFill>
+                  <a:srgbClr val="00B050"/>
+                </a:solidFill>
+              </a:rPr>
+              <a:t>no mining or proof of stake</a:t>
+            </a:r>
+            <a:r>
+              <a:rPr lang="en-US" sz="1400"/>
+              <a:t> needed) - Federated Byzanntine Agreement</a:t>
+            </a:r>
+          </a:p>
+        </p:txBody>
+      </p:sp>
+      <p:sp>
+        <p:nvSpPr>
+          <p:cNvPr id="7" name="TextBox 6">
+            <a:extLst>
+              <a:ext uri="{FF2B5EF4-FFF2-40B4-BE49-F238E27FC236}">
+                <a16:creationId xmlns:a16="http://schemas.microsoft.com/office/drawing/2014/main" id="{D39FF3C4-289F-8C82-5F1A-2597B69EF113}"/>
+              </a:ext>
+            </a:extLst>
+          </p:cNvPr>
+          <p:cNvSpPr txBox="1"/>
+          <p:nvPr/>
+        </p:nvSpPr>
+        <p:spPr>
+          <a:xfrm>
+            <a:off x="7331138" y="3419384"/>
+            <a:ext cx="1800808" cy="954107"/>
+          </a:xfrm>
+          <a:prstGeom prst="rect">
+            <a:avLst/>
+          </a:prstGeom>
+          <a:noFill/>
+        </p:spPr>
+        <p:txBody>
+          <a:bodyPr wrap="square" rtlCol="0">
+            <a:spAutoFit/>
+          </a:bodyPr>
+          <a:lstStyle/>
+          <a:p>
+            <a:pPr algn="ctr"/>
+            <a:r>
+              <a:rPr lang="en-US" sz="1400" b="1">
+                <a:solidFill>
+                  <a:srgbClr val="00B050"/>
+                </a:solidFill>
+              </a:rPr>
+              <a:t>Jed McCaleb</a:t>
+            </a:r>
+            <a:r>
+              <a:rPr lang="en-US" sz="1400"/>
+              <a:t>,</a:t>
+            </a:r>
+          </a:p>
+          <a:p>
+            <a:pPr algn="ctr"/>
+            <a:r>
+              <a:rPr lang="en-US" sz="1400"/>
+              <a:t>founder of Ripple, </a:t>
+            </a:r>
+            <a:br>
+              <a:rPr lang="en-US" sz="1400"/>
+            </a:br>
+            <a:r>
+              <a:rPr lang="en-US" sz="1400"/>
+              <a:t>co-founder of </a:t>
+            </a:r>
+            <a:r>
+              <a:rPr lang="en-US" sz="1400" b="1">
+                <a:solidFill>
+                  <a:srgbClr val="00B050"/>
+                </a:solidFill>
+              </a:rPr>
+              <a:t>Stellar</a:t>
+            </a:r>
+            <a:r>
+              <a:rPr lang="en-US" sz="1400"/>
+              <a:t> and </a:t>
+            </a:r>
+            <a:r>
+              <a:rPr lang="en-US" sz="1400" b="1">
+                <a:solidFill>
+                  <a:srgbClr val="00B050"/>
+                </a:solidFill>
+              </a:rPr>
+              <a:t>Interstellar</a:t>
             </a:r>
           </a:p>
         </p:txBody>
       </p:sp>
       <p:pic>
         <p:nvPicPr>
-          <p:cNvPr id="4" name="Picture 3">
+          <p:cNvPr id="14" name="Picture 13">
             <a:extLst>
               <a:ext uri="{FF2B5EF4-FFF2-40B4-BE49-F238E27FC236}">
-                <a16:creationId xmlns:a16="http://schemas.microsoft.com/office/drawing/2014/main" id="{442092FA-C9EC-9A42-8AF8-4A2E15786CF4}"/>
+                <a16:creationId xmlns:a16="http://schemas.microsoft.com/office/drawing/2014/main" id="{98D02EFD-26FB-D446-EC0A-104614A78278}"/>
               </a:ext>
             </a:extLst>
           </p:cNvPr>
@@ -6687,7 +7330,7 @@
           <p:nvPr/>
         </p:nvPicPr>
         <p:blipFill>
-          <a:blip r:embed="rId6" cstate="email">
+          <a:blip r:embed="rId10" cstate="email">
             <a:extLst>
               <a:ext uri="{28A0092B-C50C-407E-A947-70E740481C1C}">
                 <a14:useLocalDpi xmlns:a14="http://schemas.microsoft.com/office/drawing/2010/main"/>
@@ -6699,9 +7342,9 @@
           </a:stretch>
         </p:blipFill>
         <p:spPr>
-          <a:xfrm rot="5400000">
-            <a:off x="9128242" y="562388"/>
-            <a:ext cx="1258880" cy="2574722"/>
+          <a:xfrm>
+            <a:off x="7750487" y="2107137"/>
+            <a:ext cx="962111" cy="1312247"/>
           </a:xfrm>
           <a:prstGeom prst="rect">
             <a:avLst/>
@@ -6710,10 +7353,10 @@
       </p:pic>
       <p:pic>
         <p:nvPicPr>
-          <p:cNvPr id="5" name="Picture 4">
+          <p:cNvPr id="3" name="Picture 2">
             <a:extLst>
               <a:ext uri="{FF2B5EF4-FFF2-40B4-BE49-F238E27FC236}">
-                <a16:creationId xmlns:a16="http://schemas.microsoft.com/office/drawing/2014/main" id="{AC926C88-FAFB-8944-BB3B-C61F2995F0F2}"/>
+                <a16:creationId xmlns:a16="http://schemas.microsoft.com/office/drawing/2014/main" id="{EBBD77FA-5B73-68B2-5AB5-5E0F71F42CCB}"/>
               </a:ext>
             </a:extLst>
           </p:cNvPr>
@@ -6723,7 +7366,7 @@
           <p:nvPr/>
         </p:nvPicPr>
         <p:blipFill>
-          <a:blip r:embed="rId7" cstate="email">
+          <a:blip r:embed="rId11" cstate="email">
             <a:extLst>
               <a:ext uri="{28A0092B-C50C-407E-A947-70E740481C1C}">
                 <a14:useLocalDpi xmlns:a14="http://schemas.microsoft.com/office/drawing/2010/main"/>
@@ -6736,8 +7379,8 @@
         </p:blipFill>
         <p:spPr>
           <a:xfrm>
-            <a:off x="2563438" y="2058425"/>
-            <a:ext cx="1041095" cy="1676568"/>
+            <a:off x="8977744" y="74646"/>
+            <a:ext cx="3095501" cy="781331"/>
           </a:xfrm>
           <a:prstGeom prst="rect">
             <a:avLst/>
@@ -6746,100 +7389,230 @@
       </p:pic>
       <p:pic>
         <p:nvPicPr>
-          <p:cNvPr id="1026" name="Picture 2" descr="Cold Storage Wallet to Secure Your Crypto | Meet Arculus">
+          <p:cNvPr id="6" name="Picture 5">
             <a:extLst>
               <a:ext uri="{FF2B5EF4-FFF2-40B4-BE49-F238E27FC236}">
-                <a16:creationId xmlns:a16="http://schemas.microsoft.com/office/drawing/2014/main" id="{77FFEF9A-863D-624D-9498-4BB97AC6CAF3}"/>
+                <a16:creationId xmlns:a16="http://schemas.microsoft.com/office/drawing/2014/main" id="{855651ED-5674-87BE-B2EA-9B9DB8D5414C}"/>
               </a:ext>
             </a:extLst>
           </p:cNvPr>
           <p:cNvPicPr>
-            <a:picLocks noChangeAspect="1" noChangeArrowheads="1"/>
+            <a:picLocks noChangeAspect="1"/>
           </p:cNvPicPr>
           <p:nvPr/>
         </p:nvPicPr>
-        <p:blipFill rotWithShape="1">
-          <a:blip r:embed="rId8" cstate="email">
+        <p:blipFill>
+          <a:blip r:embed="rId12" cstate="email">
             <a:extLst>
               <a:ext uri="{28A0092B-C50C-407E-A947-70E740481C1C}">
                 <a14:useLocalDpi xmlns:a14="http://schemas.microsoft.com/office/drawing/2010/main"/>
               </a:ext>
             </a:extLst>
           </a:blip>
-          <a:srcRect/>
-          <a:stretch/>
+          <a:stretch>
+            <a:fillRect/>
+          </a:stretch>
         </p:blipFill>
-        <p:spPr bwMode="auto">
-          <a:xfrm>
-            <a:off x="8114721" y="2896709"/>
-            <a:ext cx="1741765" cy="1450240"/>
+        <p:spPr>
+          <a:xfrm>
+            <a:off x="9331881" y="2100790"/>
+            <a:ext cx="1050309" cy="1318594"/>
+          </a:xfrm>
+          <a:prstGeom prst="rect">
+            <a:avLst/>
+          </a:prstGeom>
+        </p:spPr>
+      </p:pic>
+      <p:sp>
+        <p:nvSpPr>
+          <p:cNvPr id="11" name="TextBox 10">
+            <a:extLst>
+              <a:ext uri="{FF2B5EF4-FFF2-40B4-BE49-F238E27FC236}">
+                <a16:creationId xmlns:a16="http://schemas.microsoft.com/office/drawing/2014/main" id="{2F4717E4-4B1C-E801-3F21-AF5EE6155580}"/>
+              </a:ext>
+            </a:extLst>
+          </p:cNvPr>
+          <p:cNvSpPr txBox="1"/>
+          <p:nvPr/>
+        </p:nvSpPr>
+        <p:spPr>
+          <a:xfrm>
+            <a:off x="9009092" y="3440929"/>
+            <a:ext cx="1695885" cy="523220"/>
           </a:xfrm>
           <a:prstGeom prst="rect">
             <a:avLst/>
           </a:prstGeom>
           <a:noFill/>
-          <a:extLst>
-            <a:ext uri="{909E8E84-426E-40DD-AFC4-6F175D3DCCD1}">
-              <a14:hiddenFill xmlns:a14="http://schemas.microsoft.com/office/drawing/2010/main">
-                <a:solidFill>
-                  <a:srgbClr val="FFFFFF"/>
-                </a:solidFill>
-              </a14:hiddenFill>
-            </a:ext>
-          </a:extLst>
-        </p:spPr>
-      </p:pic>
+        </p:spPr>
+        <p:txBody>
+          <a:bodyPr wrap="square" rtlCol="0">
+            <a:spAutoFit/>
+          </a:bodyPr>
+          <a:lstStyle/>
+          <a:p>
+            <a:pPr algn="ctr"/>
+            <a:r>
+              <a:rPr lang="en-US" sz="1400" b="1">
+                <a:solidFill>
+                  <a:srgbClr val="00B050"/>
+                </a:solidFill>
+              </a:rPr>
+              <a:t>Joyce Kim</a:t>
+            </a:r>
+            <a:r>
+              <a:rPr lang="en-US" sz="1400"/>
+              <a:t>, </a:t>
+            </a:r>
+            <a:br>
+              <a:rPr lang="en-US" sz="1400"/>
+            </a:br>
+            <a:r>
+              <a:rPr lang="en-US" sz="1400"/>
+              <a:t>co-founder of </a:t>
+            </a:r>
+            <a:r>
+              <a:rPr lang="en-US" sz="1400" b="1">
+                <a:solidFill>
+                  <a:srgbClr val="00B050"/>
+                </a:solidFill>
+              </a:rPr>
+              <a:t>Stellar</a:t>
+            </a:r>
+          </a:p>
+        </p:txBody>
+      </p:sp>
       <p:pic>
         <p:nvPicPr>
-          <p:cNvPr id="1028" name="Picture 4" descr="SafePal Crypto Hardware Wallet(Official) | The best wallet to protect your  assets">
+          <p:cNvPr id="8" name="Picture 7">
             <a:extLst>
               <a:ext uri="{FF2B5EF4-FFF2-40B4-BE49-F238E27FC236}">
-                <a16:creationId xmlns:a16="http://schemas.microsoft.com/office/drawing/2014/main" id="{26AC31D8-2196-A043-BAFF-554D7C635991}"/>
+                <a16:creationId xmlns:a16="http://schemas.microsoft.com/office/drawing/2014/main" id="{A66D2C18-C34A-EAAE-FA9B-B0ACA7B64B2A}"/>
               </a:ext>
             </a:extLst>
           </p:cNvPr>
           <p:cNvPicPr>
-            <a:picLocks noChangeAspect="1" noChangeArrowheads="1"/>
+            <a:picLocks noChangeAspect="1"/>
           </p:cNvPicPr>
           <p:nvPr/>
         </p:nvPicPr>
         <p:blipFill>
-          <a:blip r:embed="rId9" cstate="email">
+          <a:blip r:embed="rId13" cstate="email">
             <a:extLst>
               <a:ext uri="{28A0092B-C50C-407E-A947-70E740481C1C}">
                 <a14:useLocalDpi xmlns:a14="http://schemas.microsoft.com/office/drawing/2010/main"/>
               </a:ext>
             </a:extLst>
           </a:blip>
-          <a:srcRect/>
           <a:stretch>
             <a:fillRect/>
           </a:stretch>
         </p:blipFill>
-        <p:spPr bwMode="auto">
-          <a:xfrm>
-            <a:off x="2142224" y="4056480"/>
-            <a:ext cx="1883521" cy="1450240"/>
+        <p:spPr>
+          <a:xfrm>
+            <a:off x="8600034" y="1161829"/>
+            <a:ext cx="3519343" cy="633109"/>
+          </a:xfrm>
+          <a:prstGeom prst="rect">
+            <a:avLst/>
+          </a:prstGeom>
+        </p:spPr>
+      </p:pic>
+      <p:pic>
+        <p:nvPicPr>
+          <p:cNvPr id="10" name="Picture 9">
+            <a:extLst>
+              <a:ext uri="{FF2B5EF4-FFF2-40B4-BE49-F238E27FC236}">
+                <a16:creationId xmlns:a16="http://schemas.microsoft.com/office/drawing/2014/main" id="{5D11F69C-1C39-E95F-E9A5-1B31ACAFDEE7}"/>
+              </a:ext>
+            </a:extLst>
+          </p:cNvPr>
+          <p:cNvPicPr>
+            <a:picLocks noChangeAspect="1"/>
+          </p:cNvPicPr>
+          <p:nvPr/>
+        </p:nvPicPr>
+        <p:blipFill>
+          <a:blip r:embed="rId14" cstate="email">
+            <a:extLst>
+              <a:ext uri="{28A0092B-C50C-407E-A947-70E740481C1C}">
+                <a14:useLocalDpi xmlns:a14="http://schemas.microsoft.com/office/drawing/2010/main"/>
+              </a:ext>
+            </a:extLst>
+          </a:blip>
+          <a:stretch>
+            <a:fillRect/>
+          </a:stretch>
+        </p:blipFill>
+        <p:spPr>
+          <a:xfrm>
+            <a:off x="10978988" y="2121037"/>
+            <a:ext cx="1009656" cy="1307963"/>
+          </a:xfrm>
+          <a:prstGeom prst="rect">
+            <a:avLst/>
+          </a:prstGeom>
+        </p:spPr>
+      </p:pic>
+      <p:sp>
+        <p:nvSpPr>
+          <p:cNvPr id="15" name="TextBox 14">
+            <a:extLst>
+              <a:ext uri="{FF2B5EF4-FFF2-40B4-BE49-F238E27FC236}">
+                <a16:creationId xmlns:a16="http://schemas.microsoft.com/office/drawing/2014/main" id="{397A1FFF-D3CD-BF8F-53E9-B25876C35927}"/>
+              </a:ext>
+            </a:extLst>
+          </p:cNvPr>
+          <p:cNvSpPr txBox="1"/>
+          <p:nvPr/>
+        </p:nvSpPr>
+        <p:spPr>
+          <a:xfrm>
+            <a:off x="10787415" y="3429000"/>
+            <a:ext cx="1399892" cy="523220"/>
           </a:xfrm>
           <a:prstGeom prst="rect">
             <a:avLst/>
           </a:prstGeom>
           <a:noFill/>
-          <a:extLst>
-            <a:ext uri="{909E8E84-426E-40DD-AFC4-6F175D3DCCD1}">
-              <a14:hiddenFill xmlns:a14="http://schemas.microsoft.com/office/drawing/2010/main">
-                <a:solidFill>
-                  <a:srgbClr val="FFFFFF"/>
-                </a:solidFill>
-              </a14:hiddenFill>
-            </a:ext>
-          </a:extLst>
-        </p:spPr>
-      </p:pic>
+        </p:spPr>
+        <p:txBody>
+          <a:bodyPr wrap="square" rtlCol="0">
+            <a:spAutoFit/>
+          </a:bodyPr>
+          <a:lstStyle/>
+          <a:p>
+            <a:pPr algn="ctr"/>
+            <a:r>
+              <a:rPr lang="en-US" sz="1400" b="1">
+                <a:solidFill>
+                  <a:srgbClr val="00B050"/>
+                </a:solidFill>
+              </a:rPr>
+              <a:t>Mike Kennedy</a:t>
+            </a:r>
+          </a:p>
+          <a:p>
+            <a:pPr algn="ctr"/>
+            <a:r>
+              <a:rPr lang="en-US" sz="1400"/>
+              <a:t>CEO, </a:t>
+            </a:r>
+            <a:r>
+              <a:rPr lang="en-US" sz="1400" b="1">
+                <a:solidFill>
+                  <a:srgbClr val="00B050"/>
+                </a:solidFill>
+              </a:rPr>
+              <a:t>Interstellar</a:t>
+            </a:r>
+          </a:p>
+        </p:txBody>
+      </p:sp>
     </p:spTree>
     <p:extLst>
       <p:ext uri="{BB962C8B-B14F-4D97-AF65-F5344CB8AC3E}">
-        <p14:creationId xmlns:p14="http://schemas.microsoft.com/office/powerpoint/2010/main" val="4212851956"/>
+        <p14:creationId xmlns:p14="http://schemas.microsoft.com/office/powerpoint/2010/main" val="851578736"/>
       </p:ext>
     </p:extLst>
   </p:cSld>
@@ -6871,7 +7644,7 @@
           <p:cNvPr id="2" name="TextBox 1">
             <a:extLst>
               <a:ext uri="{FF2B5EF4-FFF2-40B4-BE49-F238E27FC236}">
-                <a16:creationId xmlns:a16="http://schemas.microsoft.com/office/drawing/2014/main" id="{0575C187-42F0-97C5-A7D3-9794D52E83B8}"/>
+                <a16:creationId xmlns:a16="http://schemas.microsoft.com/office/drawing/2014/main" id="{3BFA91D7-B506-539E-10C5-FA01AC7A649F}"/>
               </a:ext>
             </a:extLst>
           </p:cNvPr>
@@ -6880,8 +7653,8 @@
         </p:nvSpPr>
         <p:spPr>
           <a:xfrm>
-            <a:off x="101600" y="822960"/>
-            <a:ext cx="4348480" cy="954107"/>
+            <a:off x="0" y="0"/>
+            <a:ext cx="2659224" cy="523220"/>
           </a:xfrm>
           <a:prstGeom prst="rect">
             <a:avLst/>
@@ -6894,67 +7667,9 @@
           </a:bodyPr>
           <a:lstStyle/>
           <a:p>
-            <a:pPr marL="285750" indent="-285750">
-              <a:buFont typeface="Arial" panose="020B0604020202020204" pitchFamily="34" charset="0"/>
-              <a:buChar char="•"/>
-            </a:pPr>
-            <a:r>
-              <a:rPr lang="en-US" sz="1400">
-                <a:hlinkClick r:id="rId3"/>
-              </a:rPr>
-              <a:t>https://github.com/bitcoin</a:t>
-            </a:r>
-            <a:r>
-              <a:rPr lang="en-US" sz="1400"/>
-              <a:t> – bitcoin source code</a:t>
-            </a:r>
-          </a:p>
-          <a:p>
-            <a:pPr marL="285750" indent="-285750">
-              <a:buFont typeface="Arial" panose="020B0604020202020204" pitchFamily="34" charset="0"/>
-              <a:buChar char="•"/>
-            </a:pPr>
-            <a:r>
-              <a:rPr lang="en-US" sz="1400">
-                <a:hlinkClick r:id="rId4"/>
-              </a:rPr>
-              <a:t>https://bitcoincore.org/</a:t>
-            </a:r>
-            <a:r>
-              <a:rPr lang="en-US" sz="1400"/>
-              <a:t> - downloadable binaries</a:t>
-            </a:r>
-          </a:p>
-          <a:p>
-            <a:pPr marL="285750" indent="-285750">
-              <a:buFont typeface="Arial" panose="020B0604020202020204" pitchFamily="34" charset="0"/>
-              <a:buChar char="•"/>
-            </a:pPr>
-            <a:r>
-              <a:rPr lang="en-US" sz="1400">
-                <a:hlinkClick r:id="rId5"/>
-              </a:rPr>
-              <a:t>https://bitcoin.org</a:t>
-            </a:r>
-            <a:r>
-              <a:rPr lang="en-US" sz="1400"/>
-              <a:t> </a:t>
-            </a:r>
-          </a:p>
-          <a:p>
-            <a:pPr marL="285750" indent="-285750">
-              <a:buFont typeface="Arial" panose="020B0604020202020204" pitchFamily="34" charset="0"/>
-              <a:buChar char="•"/>
-            </a:pPr>
-            <a:r>
-              <a:rPr lang="en-US" sz="1400">
-                <a:hlinkClick r:id="rId6"/>
-              </a:rPr>
-              <a:t>https://bitcoin.org/en/choose-your-wallet</a:t>
-            </a:r>
-            <a:r>
-              <a:rPr lang="en-US" sz="1400"/>
-              <a:t> - </a:t>
+            <a:r>
+              <a:rPr lang="en-US" sz="2800" b="1"/>
+              <a:t>Crypto ATM</a:t>
             </a:r>
           </a:p>
         </p:txBody>
@@ -6964,7 +7679,7 @@
           <p:cNvPr id="3" name="TextBox 2">
             <a:extLst>
               <a:ext uri="{FF2B5EF4-FFF2-40B4-BE49-F238E27FC236}">
-                <a16:creationId xmlns:a16="http://schemas.microsoft.com/office/drawing/2014/main" id="{8C47D106-328D-1E16-FF20-B27EE1128845}"/>
+                <a16:creationId xmlns:a16="http://schemas.microsoft.com/office/drawing/2014/main" id="{E6C2485C-F55A-A5C5-C9EA-19A8FFA5C14A}"/>
               </a:ext>
             </a:extLst>
           </p:cNvPr>
@@ -6973,8 +7688,8 @@
         </p:nvSpPr>
         <p:spPr>
           <a:xfrm>
-            <a:off x="0" y="0"/>
-            <a:ext cx="2672080" cy="523220"/>
+            <a:off x="0" y="534364"/>
+            <a:ext cx="4348065" cy="2677656"/>
           </a:xfrm>
           <a:prstGeom prst="rect">
             <a:avLst/>
@@ -6987,53 +7702,33 @@
           </a:bodyPr>
           <a:lstStyle/>
           <a:p>
-            <a:r>
-              <a:rPr lang="en-US" sz="2800" b="1"/>
-              <a:t>Bitcoin Wallets</a:t>
-            </a:r>
-          </a:p>
-        </p:txBody>
-      </p:sp>
-      <p:sp>
-        <p:nvSpPr>
-          <p:cNvPr id="4" name="TextBox 3">
-            <a:extLst>
-              <a:ext uri="{FF2B5EF4-FFF2-40B4-BE49-F238E27FC236}">
-                <a16:creationId xmlns:a16="http://schemas.microsoft.com/office/drawing/2014/main" id="{56565DC5-E2D9-F61B-A567-16E87971217E}"/>
-              </a:ext>
-            </a:extLst>
-          </p:cNvPr>
-          <p:cNvSpPr txBox="1"/>
-          <p:nvPr/>
-        </p:nvSpPr>
-        <p:spPr>
-          <a:xfrm>
-            <a:off x="101600" y="2076807"/>
-            <a:ext cx="3891280" cy="3754874"/>
-          </a:xfrm>
-          <a:prstGeom prst="rect">
-            <a:avLst/>
-          </a:prstGeom>
-          <a:noFill/>
-        </p:spPr>
-        <p:txBody>
-          <a:bodyPr wrap="square" rtlCol="0">
-            <a:spAutoFit/>
-          </a:bodyPr>
-          <a:lstStyle/>
-          <a:p>
-            <a:r>
-              <a:rPr lang="en-US" sz="1400"/>
-              <a:t>For most users, Bitcoin is nothing more than an app that provides a personal Bitcoin wallet and allows a user to send and receive bitcoins.</a:t>
-            </a:r>
-          </a:p>
-          <a:p>
-            <a:endParaRPr lang="en-US" sz="1400"/>
-          </a:p>
-          <a:p>
-            <a:r>
-              <a:rPr lang="en-US" sz="1400"/>
-              <a:t>Behind the scenes, the Bitcoin network is sharing a public ledger called the "block chain". This ledger contains every transaction ever processed, allowing a user's computer to verify the validity of each transaction. The authenticity of each transaction is protected by digital signatures corresponding to the sending addresses, allowing all users to have full control over sending bitcoins from their own Bitcoin addresses. In addition, anyone can process transactions using the computing power of specialized hardware and earn a reward in bitcoins for this service. This is called "mining".</a:t>
+            <a:pPr marL="285750" indent="-285750">
+              <a:buFont typeface="Arial" panose="020B0604020202020204" pitchFamily="34" charset="0"/>
+              <a:buChar char="•"/>
+            </a:pPr>
+            <a:r>
+              <a:rPr lang="en-US" sz="1400"/>
+              <a:t>A crypto ATM is an Internet-connected kiosk that allows customers to purchase bitcoins and/or other cryptocurrencies with deposited cash and make blockchain-based transactions that send cryptocurrencies to the user's digital wallet, often via the use of a QR code.</a:t>
+            </a:r>
+          </a:p>
+          <a:p>
+            <a:pPr marL="285750" indent="-285750">
+              <a:buFont typeface="Arial" panose="020B0604020202020204" pitchFamily="34" charset="0"/>
+              <a:buChar char="•"/>
+            </a:pPr>
+            <a:r>
+              <a:rPr lang="en-US" sz="1400"/>
+              <a:t>There are currently (Summer 2021) more than 14,000 bitcoin ATMs in operation around the world.</a:t>
+            </a:r>
+          </a:p>
+          <a:p>
+            <a:pPr marL="285750" indent="-285750">
+              <a:buFont typeface="Arial" panose="020B0604020202020204" pitchFamily="34" charset="0"/>
+              <a:buChar char="•"/>
+            </a:pPr>
+            <a:r>
+              <a:rPr lang="en-US" sz="1400"/>
+              <a:t>A bitcoin ATM is not the same as an automated teller machine (ATM) that allows bank customers to physically withdraw, deposit, or transfer funds in one's bank account.</a:t>
             </a:r>
           </a:p>
         </p:txBody>
@@ -7043,7 +7738,7 @@
           <p:cNvPr id="5" name="Picture 4">
             <a:extLst>
               <a:ext uri="{FF2B5EF4-FFF2-40B4-BE49-F238E27FC236}">
-                <a16:creationId xmlns:a16="http://schemas.microsoft.com/office/drawing/2014/main" id="{A0C92002-0C3B-CB92-51EB-BAFE3187F797}"/>
+                <a16:creationId xmlns:a16="http://schemas.microsoft.com/office/drawing/2014/main" id="{D5FAF214-85CA-D21E-7320-0CBC459EE6A0}"/>
               </a:ext>
             </a:extLst>
           </p:cNvPr>
@@ -7053,7 +7748,7 @@
           <p:nvPr/>
         </p:nvPicPr>
         <p:blipFill>
-          <a:blip r:embed="rId7" cstate="email">
+          <a:blip r:embed="rId2" cstate="email">
             <a:extLst>
               <a:ext uri="{28A0092B-C50C-407E-A947-70E740481C1C}">
                 <a14:useLocalDpi xmlns:a14="http://schemas.microsoft.com/office/drawing/2010/main"/>
@@ -7066,175 +7761,126 @@
         </p:blipFill>
         <p:spPr>
           <a:xfrm>
-            <a:off x="6997114" y="1777067"/>
-            <a:ext cx="5093286" cy="4978400"/>
+            <a:off x="8114905" y="123112"/>
+            <a:ext cx="3094000" cy="3954364"/>
           </a:xfrm>
           <a:prstGeom prst="rect">
             <a:avLst/>
           </a:prstGeom>
         </p:spPr>
       </p:pic>
-      <p:sp>
-        <p:nvSpPr>
-          <p:cNvPr id="6" name="TextBox 5">
+      <p:pic>
+        <p:nvPicPr>
+          <p:cNvPr id="6" name="Picture 5">
             <a:extLst>
               <a:ext uri="{FF2B5EF4-FFF2-40B4-BE49-F238E27FC236}">
-                <a16:creationId xmlns:a16="http://schemas.microsoft.com/office/drawing/2014/main" id="{1ADF14D1-8EF1-5FDB-784C-F5239D51A04F}"/>
+                <a16:creationId xmlns:a16="http://schemas.microsoft.com/office/drawing/2014/main" id="{B83CB1FB-66A2-0280-42C8-A1E020EAF0A1}"/>
               </a:ext>
             </a:extLst>
           </p:cNvPr>
-          <p:cNvSpPr txBox="1"/>
+          <p:cNvPicPr>
+            <a:picLocks noChangeAspect="1"/>
+          </p:cNvPicPr>
           <p:nvPr/>
-        </p:nvSpPr>
-        <p:spPr>
-          <a:xfrm>
-            <a:off x="5405120" y="153888"/>
-            <a:ext cx="6685280" cy="954107"/>
+        </p:nvPicPr>
+        <p:blipFill>
+          <a:blip r:embed="rId3" cstate="email">
+            <a:extLst>
+              <a:ext uri="{28A0092B-C50C-407E-A947-70E740481C1C}">
+                <a14:useLocalDpi xmlns:a14="http://schemas.microsoft.com/office/drawing/2010/main"/>
+              </a:ext>
+            </a:extLst>
+          </a:blip>
+          <a:stretch>
+            <a:fillRect/>
+          </a:stretch>
+        </p:blipFill>
+        <p:spPr>
+          <a:xfrm>
+            <a:off x="5516122" y="123112"/>
+            <a:ext cx="2327815" cy="3954364"/>
           </a:xfrm>
           <a:prstGeom prst="rect">
             <a:avLst/>
           </a:prstGeom>
-          <a:noFill/>
-        </p:spPr>
-        <p:txBody>
-          <a:bodyPr wrap="square" rtlCol="0">
-            <a:spAutoFit/>
-          </a:bodyPr>
-          <a:lstStyle/>
-          <a:p>
-            <a:pPr marL="285750" indent="-285750">
-              <a:buFont typeface="Arial" panose="020B0604020202020204" pitchFamily="34" charset="0"/>
-              <a:buChar char="•"/>
-            </a:pPr>
-            <a:r>
-              <a:rPr lang="en-US" sz="1400" b="1">
-                <a:solidFill>
-                  <a:srgbClr val="FF0000"/>
-                </a:solidFill>
-              </a:rPr>
-              <a:t>Bitcoin Core</a:t>
-            </a:r>
-            <a:r>
-              <a:rPr lang="en-US" sz="1400"/>
-              <a:t> is a </a:t>
-            </a:r>
-            <a:r>
-              <a:rPr lang="en-US" sz="1400" b="1">
-                <a:solidFill>
-                  <a:srgbClr val="00B050"/>
-                </a:solidFill>
-              </a:rPr>
-              <a:t>full Bitcoin client</a:t>
-            </a:r>
-            <a:r>
-              <a:rPr lang="en-US" sz="1400"/>
-              <a:t> and builds the backbone of the network. </a:t>
-            </a:r>
-          </a:p>
-          <a:p>
-            <a:pPr marL="285750" indent="-285750">
-              <a:buFont typeface="Arial" panose="020B0604020202020204" pitchFamily="34" charset="0"/>
-              <a:buChar char="•"/>
-            </a:pPr>
-            <a:r>
-              <a:rPr lang="en-US" sz="1400" b="1">
-                <a:solidFill>
-                  <a:srgbClr val="FF0000"/>
-                </a:solidFill>
-              </a:rPr>
-              <a:t>Bitcoin Core</a:t>
-            </a:r>
-            <a:r>
-              <a:rPr lang="en-US" sz="1400"/>
-              <a:t> offers high levels of security, privacy, and stability. </a:t>
-            </a:r>
-            <a:br>
-              <a:rPr lang="en-US" sz="1400"/>
-            </a:br>
-            <a:r>
-              <a:rPr lang="en-US" sz="1400"/>
-              <a:t>However, it has fewer features and it takes a lot of space and memory.</a:t>
-            </a:r>
-          </a:p>
-          <a:p>
-            <a:pPr marL="285750" indent="-285750">
-              <a:buFont typeface="Arial" panose="020B0604020202020204" pitchFamily="34" charset="0"/>
-              <a:buChar char="•"/>
-            </a:pPr>
-            <a:r>
-              <a:rPr lang="en-US" sz="1400" b="1">
-                <a:solidFill>
-                  <a:srgbClr val="FF0000"/>
-                </a:solidFill>
-              </a:rPr>
-              <a:t>Bitcoin Core</a:t>
-            </a:r>
-            <a:r>
-              <a:rPr lang="en-US" sz="1400"/>
-              <a:t> offers can be downloaded here: </a:t>
-            </a:r>
-            <a:r>
-              <a:rPr lang="en-US" sz="1000">
-                <a:hlinkClick r:id="rId8"/>
-              </a:rPr>
-              <a:t>https://bitcoincore.org/en/download/</a:t>
-            </a:r>
-            <a:endParaRPr lang="en-US" sz="1000"/>
-          </a:p>
-        </p:txBody>
-      </p:sp>
-      <p:sp>
-        <p:nvSpPr>
-          <p:cNvPr id="7" name="TextBox 6">
+        </p:spPr>
+      </p:pic>
+      <p:pic>
+        <p:nvPicPr>
+          <p:cNvPr id="7" name="Picture 6">
             <a:extLst>
               <a:ext uri="{FF2B5EF4-FFF2-40B4-BE49-F238E27FC236}">
-                <a16:creationId xmlns:a16="http://schemas.microsoft.com/office/drawing/2014/main" id="{152A9575-F217-4A40-7E1E-C40A76B5548A}"/>
+                <a16:creationId xmlns:a16="http://schemas.microsoft.com/office/drawing/2014/main" id="{B209FA30-F941-A056-3CBD-2D9804B89DBB}"/>
               </a:ext>
             </a:extLst>
           </p:cNvPr>
-          <p:cNvSpPr txBox="1"/>
+          <p:cNvPicPr>
+            <a:picLocks noChangeAspect="1"/>
+          </p:cNvPicPr>
           <p:nvPr/>
-        </p:nvSpPr>
-        <p:spPr>
-          <a:xfrm>
-            <a:off x="7628597" y="1315402"/>
-            <a:ext cx="3830320" cy="461665"/>
+        </p:nvPicPr>
+        <p:blipFill>
+          <a:blip r:embed="rId4" cstate="email">
+            <a:extLst>
+              <a:ext uri="{28A0092B-C50C-407E-A947-70E740481C1C}">
+                <a14:useLocalDpi xmlns:a14="http://schemas.microsoft.com/office/drawing/2010/main"/>
+              </a:ext>
+            </a:extLst>
+          </a:blip>
+          <a:stretch>
+            <a:fillRect/>
+          </a:stretch>
+        </p:blipFill>
+        <p:spPr>
+          <a:xfrm>
+            <a:off x="96942" y="3369853"/>
+            <a:ext cx="4978911" cy="3402097"/>
           </a:xfrm>
           <a:prstGeom prst="rect">
             <a:avLst/>
           </a:prstGeom>
-          <a:noFill/>
-        </p:spPr>
-        <p:txBody>
-          <a:bodyPr wrap="square" rtlCol="0">
-            <a:spAutoFit/>
-          </a:bodyPr>
-          <a:lstStyle/>
-          <a:p>
-            <a:r>
-              <a:rPr lang="en-US" sz="1400" b="1">
-                <a:solidFill>
-                  <a:srgbClr val="00B050"/>
-                </a:solidFill>
-              </a:rPr>
-              <a:t>Choose your wallet – on bitcoin.org:</a:t>
-            </a:r>
-          </a:p>
-          <a:p>
-            <a:r>
-              <a:rPr lang="en-US" sz="1000">
-                <a:hlinkClick r:id="rId9"/>
-              </a:rPr>
-              <a:t>https://bitcoin.org/en/choose-your-wallet?step=5&amp;platform=mac</a:t>
-            </a:r>
-            <a:endParaRPr lang="en-US" sz="1000"/>
-          </a:p>
-        </p:txBody>
-      </p:sp>
+        </p:spPr>
+      </p:pic>
+      <p:pic>
+        <p:nvPicPr>
+          <p:cNvPr id="8" name="Picture 7">
+            <a:extLst>
+              <a:ext uri="{FF2B5EF4-FFF2-40B4-BE49-F238E27FC236}">
+                <a16:creationId xmlns:a16="http://schemas.microsoft.com/office/drawing/2014/main" id="{536BDA42-012E-19F1-6188-0698AE2AC3C2}"/>
+              </a:ext>
+            </a:extLst>
+          </p:cNvPr>
+          <p:cNvPicPr>
+            <a:picLocks noChangeAspect="1"/>
+          </p:cNvPicPr>
+          <p:nvPr/>
+        </p:nvPicPr>
+        <p:blipFill>
+          <a:blip r:embed="rId5" cstate="email">
+            <a:extLst>
+              <a:ext uri="{28A0092B-C50C-407E-A947-70E740481C1C}">
+                <a14:useLocalDpi xmlns:a14="http://schemas.microsoft.com/office/drawing/2010/main"/>
+              </a:ext>
+            </a:extLst>
+          </a:blip>
+          <a:stretch>
+            <a:fillRect/>
+          </a:stretch>
+        </p:blipFill>
+        <p:spPr>
+          <a:xfrm>
+            <a:off x="5516122" y="4373901"/>
+            <a:ext cx="2327814" cy="2398049"/>
+          </a:xfrm>
+          <a:prstGeom prst="rect">
+            <a:avLst/>
+          </a:prstGeom>
+        </p:spPr>
+      </p:pic>
     </p:spTree>
     <p:extLst>
       <p:ext uri="{BB962C8B-B14F-4D97-AF65-F5344CB8AC3E}">
-        <p14:creationId xmlns:p14="http://schemas.microsoft.com/office/powerpoint/2010/main" val="3518343222"/>
+        <p14:creationId xmlns:p14="http://schemas.microsoft.com/office/powerpoint/2010/main" val="829535307"/>
       </p:ext>
     </p:extLst>
   </p:cSld>
@@ -7266,7 +7912,7 @@
           <p:cNvPr id="2" name="TextBox 1">
             <a:extLst>
               <a:ext uri="{FF2B5EF4-FFF2-40B4-BE49-F238E27FC236}">
-                <a16:creationId xmlns:a16="http://schemas.microsoft.com/office/drawing/2014/main" id="{B9D228F9-69E9-C9FC-C60F-078C9232D240}"/>
+                <a16:creationId xmlns:a16="http://schemas.microsoft.com/office/drawing/2014/main" id="{BF88A64B-BA51-D958-1AEE-4763C4B65785}"/>
               </a:ext>
             </a:extLst>
           </p:cNvPr>
@@ -7275,8 +7921,8 @@
         </p:nvSpPr>
         <p:spPr>
           <a:xfrm>
-            <a:off x="81280" y="91440"/>
-            <a:ext cx="5740400" cy="523220"/>
+            <a:off x="285134" y="1406013"/>
+            <a:ext cx="6518787" cy="923330"/>
           </a:xfrm>
           <a:prstGeom prst="rect">
             <a:avLst/>
@@ -7290,226 +7936,27 @@
           <a:lstStyle/>
           <a:p>
             <a:r>
-              <a:rPr lang="en-US" sz="2800" b="1"/>
-              <a:t>Cryptocurrency exchange / swap</a:t>
-            </a:r>
-          </a:p>
-        </p:txBody>
-      </p:sp>
-      <p:sp>
-        <p:nvSpPr>
-          <p:cNvPr id="3" name="TextBox 2">
-            <a:extLst>
-              <a:ext uri="{FF2B5EF4-FFF2-40B4-BE49-F238E27FC236}">
-                <a16:creationId xmlns:a16="http://schemas.microsoft.com/office/drawing/2014/main" id="{71663493-9CCC-0B63-8C42-C44D7D0401CC}"/>
-              </a:ext>
-            </a:extLst>
-          </p:cNvPr>
-          <p:cNvSpPr txBox="1"/>
-          <p:nvPr/>
-        </p:nvSpPr>
-        <p:spPr>
-          <a:xfrm>
-            <a:off x="81280" y="914797"/>
-            <a:ext cx="8402320" cy="3539430"/>
-          </a:xfrm>
-          <a:prstGeom prst="rect">
-            <a:avLst/>
-          </a:prstGeom>
-          <a:noFill/>
-        </p:spPr>
-        <p:txBody>
-          <a:bodyPr wrap="square" rtlCol="0">
-            <a:spAutoFit/>
-          </a:bodyPr>
-          <a:lstStyle/>
-          <a:p>
-            <a:r>
-              <a:rPr lang="en-US" sz="1400"/>
-              <a:t>You can buy Ethereum with Bitcoin on nearly any cryptocurrency exchange. </a:t>
-            </a:r>
-          </a:p>
-          <a:p>
-            <a:r>
-              <a:rPr lang="en-US" sz="1400"/>
-              <a:t>This is because </a:t>
-            </a:r>
-            <a:r>
-              <a:rPr lang="en-US" sz="1400" b="1">
-                <a:solidFill>
-                  <a:srgbClr val="00B050"/>
-                </a:solidFill>
-              </a:rPr>
-              <a:t>most of the global Ethereum trading volume</a:t>
-            </a:r>
-            <a:r>
-              <a:rPr lang="en-US" sz="1400"/>
-              <a:t> is actually </a:t>
-            </a:r>
-          </a:p>
-          <a:p>
-            <a:r>
-              <a:rPr lang="en-US" sz="1400" b="1">
-                <a:solidFill>
-                  <a:srgbClr val="00B050"/>
-                </a:solidFill>
-              </a:rPr>
-              <a:t>done in the ETH/BTC pair</a:t>
-            </a:r>
-            <a:r>
-              <a:rPr lang="en-US" sz="1400"/>
-              <a:t>, and not the ETH/USD pair.</a:t>
-            </a:r>
-          </a:p>
-          <a:p>
-            <a:endParaRPr lang="en-US" sz="1400"/>
-          </a:p>
-          <a:p>
-            <a:pPr marL="285750" indent="-285750">
-              <a:buFont typeface="Arial" panose="020B0604020202020204" pitchFamily="34" charset="0"/>
-              <a:buChar char="•"/>
-            </a:pPr>
-            <a:r>
-              <a:rPr lang="en-US" sz="1400"/>
-              <a:t>Coinbase – convert - </a:t>
-            </a:r>
-            <a:r>
-              <a:rPr lang="en-US" sz="1400">
-                <a:hlinkClick r:id="rId2"/>
-              </a:rPr>
-              <a:t>https://www.youtube.com/watch?v=bzLd7V2ZLp8</a:t>
-            </a:r>
-            <a:r>
-              <a:rPr lang="en-US" sz="1400"/>
-              <a:t> </a:t>
-            </a:r>
-          </a:p>
-          <a:p>
-            <a:pPr marL="285750" indent="-285750">
-              <a:buFont typeface="Arial" panose="020B0604020202020204" pitchFamily="34" charset="0"/>
-              <a:buChar char="•"/>
-            </a:pPr>
-            <a:r>
-              <a:rPr lang="en-US" sz="1400"/>
-              <a:t>BitPay does not directly buy or sell cryptocurrency, therefore, if you want to sell your cryptocurrency (cash your funds out), you need to do it with a third party (an exchange). </a:t>
-            </a:r>
-            <a:br>
-              <a:rPr lang="en-US" sz="1400"/>
-            </a:br>
-            <a:r>
-              <a:rPr lang="en-US" sz="1400"/>
-              <a:t>BitPay can convert Crypto to regular currency - </a:t>
-            </a:r>
-            <a:r>
-              <a:rPr lang="en-US" sz="1400">
-                <a:hlinkClick r:id="rId3"/>
-              </a:rPr>
-              <a:t>https://bitpay.com/exchange-rates/</a:t>
-            </a:r>
-            <a:r>
-              <a:rPr lang="en-US" sz="1400"/>
-              <a:t> </a:t>
-            </a:r>
-          </a:p>
-          <a:p>
-            <a:pPr marL="285750" indent="-285750">
-              <a:buFont typeface="Arial" panose="020B0604020202020204" pitchFamily="34" charset="0"/>
-              <a:buChar char="•"/>
-            </a:pPr>
-            <a:r>
-              <a:rPr lang="en-US" sz="1400">
-                <a:hlinkClick r:id="rId4"/>
-              </a:rPr>
-              <a:t>https://medium.com/@mark.lasia/how-to-exchange-bitcoin-and-tokens-into-eth-ether-with-shapeshift-io-6a326b339c12</a:t>
-            </a:r>
-            <a:endParaRPr lang="en-US" sz="1400"/>
-          </a:p>
-          <a:p>
-            <a:pPr marL="285750" indent="-285750">
-              <a:buFont typeface="Arial" panose="020B0604020202020204" pitchFamily="34" charset="0"/>
-              <a:buChar char="•"/>
-            </a:pPr>
-            <a:r>
-              <a:rPr lang="en-US" sz="1400">
-                <a:hlinkClick r:id="rId5"/>
-              </a:rPr>
-              <a:t>https://www.buybitcoinworldwide.com/ethereum/buy/</a:t>
-            </a:r>
-            <a:endParaRPr lang="en-US" sz="1400"/>
-          </a:p>
-          <a:p>
-            <a:pPr marL="285750" indent="-285750">
-              <a:buFont typeface="Arial" panose="020B0604020202020204" pitchFamily="34" charset="0"/>
-              <a:buChar char="•"/>
-            </a:pPr>
-            <a:r>
-              <a:rPr lang="en-US" sz="1400">
-                <a:hlinkClick r:id="rId6"/>
-              </a:rPr>
-              <a:t>https://letsexchange.io/exchange/btc-to-eth</a:t>
-            </a:r>
-            <a:endParaRPr lang="en-US" sz="1400"/>
-          </a:p>
-          <a:p>
-            <a:pPr marL="285750" indent="-285750">
-              <a:buFont typeface="Arial" panose="020B0604020202020204" pitchFamily="34" charset="0"/>
-              <a:buChar char="•"/>
-            </a:pPr>
-            <a:r>
-              <a:rPr lang="en-US" sz="1400">
-                <a:hlinkClick r:id="rId7"/>
-              </a:rPr>
-              <a:t>https://simpleswap.io/crypto-to-crypto/btc-eth</a:t>
-            </a:r>
-            <a:endParaRPr lang="en-US" sz="1400"/>
-          </a:p>
-          <a:p>
-            <a:pPr marL="285750" indent="-285750">
-              <a:buFont typeface="Arial" panose="020B0604020202020204" pitchFamily="34" charset="0"/>
-              <a:buChar char="•"/>
-            </a:pPr>
-            <a:r>
-              <a:rPr lang="en-US" sz="1400">
-                <a:hlinkClick r:id="rId8"/>
-              </a:rPr>
-              <a:t>https://liquality.io/blog/atomic-swaps-explained/</a:t>
-            </a:r>
-            <a:r>
-              <a:rPr lang="en-US" sz="1400"/>
-              <a:t> </a:t>
-            </a:r>
-          </a:p>
-          <a:p>
-            <a:pPr marL="285750" indent="-285750">
-              <a:buFont typeface="Arial" panose="020B0604020202020204" pitchFamily="34" charset="0"/>
-              <a:buChar char="•"/>
-            </a:pPr>
-            <a:r>
-              <a:rPr lang="en-US" sz="1400">
-                <a:hlinkClick r:id="rId9"/>
-              </a:rPr>
-              <a:t>https://liquality.io/blog/hash-time-locked-contracts-htlcs-explained/</a:t>
-            </a:r>
-            <a:endParaRPr lang="en-US" sz="1400"/>
-          </a:p>
-          <a:p>
-            <a:pPr marL="285750" indent="-285750">
-              <a:buFont typeface="Arial" panose="020B0604020202020204" pitchFamily="34" charset="0"/>
-              <a:buChar char="•"/>
-            </a:pPr>
-            <a:r>
-              <a:rPr lang="en-US" sz="1400"/>
-              <a:t>etc. etc.</a:t>
+              <a:rPr lang="en-US"/>
+              <a:t>https://www.kucoin.com/</a:t>
+            </a:r>
+          </a:p>
+          <a:p>
+            <a:endParaRPr lang="en-US"/>
+          </a:p>
+          <a:p>
+            <a:r>
+              <a:rPr lang="en-US"/>
+              <a:t>1 Out of 4 Crypto Holders Worldwide Is with KuCoin</a:t>
             </a:r>
           </a:p>
         </p:txBody>
       </p:sp>
       <p:pic>
         <p:nvPicPr>
-          <p:cNvPr id="4" name="Picture 3">
+          <p:cNvPr id="3" name="Picture 2">
             <a:extLst>
               <a:ext uri="{FF2B5EF4-FFF2-40B4-BE49-F238E27FC236}">
-                <a16:creationId xmlns:a16="http://schemas.microsoft.com/office/drawing/2014/main" id="{15F5A62C-0D73-F9D5-0625-C916AA89DB22}"/>
+                <a16:creationId xmlns:a16="http://schemas.microsoft.com/office/drawing/2014/main" id="{A4DB3B14-AD24-E8DE-DC14-8C1F3B6868FF}"/>
               </a:ext>
             </a:extLst>
           </p:cNvPr>
@@ -7519,21 +7966,15 @@
           <p:nvPr/>
         </p:nvPicPr>
         <p:blipFill>
-          <a:blip r:embed="rId10" cstate="email">
-            <a:extLst>
-              <a:ext uri="{28A0092B-C50C-407E-A947-70E740481C1C}">
-                <a14:useLocalDpi xmlns:a14="http://schemas.microsoft.com/office/drawing/2010/main"/>
-              </a:ext>
-            </a:extLst>
-          </a:blip>
+          <a:blip r:embed="rId2"/>
           <a:stretch>
             <a:fillRect/>
           </a:stretch>
         </p:blipFill>
         <p:spPr>
           <a:xfrm>
-            <a:off x="6482080" y="3933984"/>
-            <a:ext cx="5302250" cy="1783298"/>
+            <a:off x="9029700" y="0"/>
+            <a:ext cx="3162300" cy="800100"/>
           </a:xfrm>
           <a:prstGeom prst="rect">
             <a:avLst/>
@@ -7542,10 +7983,10 @@
       </p:pic>
       <p:sp>
         <p:nvSpPr>
-          <p:cNvPr id="5" name="TextBox 4">
+          <p:cNvPr id="4" name="TextBox 3">
             <a:extLst>
               <a:ext uri="{FF2B5EF4-FFF2-40B4-BE49-F238E27FC236}">
-                <a16:creationId xmlns:a16="http://schemas.microsoft.com/office/drawing/2014/main" id="{35A0BC28-F265-10D1-C05B-CB42689C0F6B}"/>
+                <a16:creationId xmlns:a16="http://schemas.microsoft.com/office/drawing/2014/main" id="{4E3DF63E-CFA0-0206-2D49-FE30E4B64B25}"/>
               </a:ext>
             </a:extLst>
           </p:cNvPr>
@@ -7554,8 +7995,8 @@
         </p:nvSpPr>
         <p:spPr>
           <a:xfrm>
-            <a:off x="7304405" y="5811272"/>
-            <a:ext cx="3657600" cy="954107"/>
+            <a:off x="127819" y="117987"/>
+            <a:ext cx="1406013" cy="523220"/>
           </a:xfrm>
           <a:prstGeom prst="rect">
             <a:avLst/>
@@ -7568,44 +8009,9 @@
           </a:bodyPr>
           <a:lstStyle/>
           <a:p>
-            <a:pPr algn="ctr"/>
-            <a:r>
-              <a:rPr lang="en-US" sz="1400" b="1">
-                <a:solidFill>
-                  <a:srgbClr val="FF0000"/>
-                </a:solidFill>
-              </a:rPr>
-              <a:t>Atomic Swaps</a:t>
-            </a:r>
-            <a:r>
-              <a:rPr lang="en-US" sz="1400"/>
-              <a:t> - Swapping Cryptocurrencies Without Trusted Third Party Mediation</a:t>
-            </a:r>
-          </a:p>
-          <a:p>
-            <a:pPr algn="ctr"/>
-            <a:r>
-              <a:rPr lang="en-US" sz="1400"/>
-              <a:t>using programmable Escrows</a:t>
-            </a:r>
-          </a:p>
-          <a:p>
-            <a:pPr algn="ctr"/>
-            <a:r>
-              <a:rPr lang="en-US" sz="1400"/>
-              <a:t>(</a:t>
-            </a:r>
-            <a:r>
-              <a:rPr lang="en-US" sz="1400" b="1">
-                <a:solidFill>
-                  <a:srgbClr val="FF0000"/>
-                </a:solidFill>
-              </a:rPr>
-              <a:t>HTLCs</a:t>
-            </a:r>
-            <a:r>
-              <a:rPr lang="en-US" sz="1400"/>
-              <a:t> = Hash Time Locked Contracts)</a:t>
+            <a:r>
+              <a:rPr lang="en-US" sz="2800" b="1"/>
+              <a:t>KuCoin</a:t>
             </a:r>
           </a:p>
         </p:txBody>
@@ -7613,7 +8019,7 @@
     </p:spTree>
     <p:extLst>
       <p:ext uri="{BB962C8B-B14F-4D97-AF65-F5344CB8AC3E}">
-        <p14:creationId xmlns:p14="http://schemas.microsoft.com/office/powerpoint/2010/main" val="3838443378"/>
+        <p14:creationId xmlns:p14="http://schemas.microsoft.com/office/powerpoint/2010/main" val="3927179015"/>
       </p:ext>
     </p:extLst>
   </p:cSld>
@@ -7645,7 +8051,7 @@
           <p:cNvPr id="2" name="TextBox 1">
             <a:extLst>
               <a:ext uri="{FF2B5EF4-FFF2-40B4-BE49-F238E27FC236}">
-                <a16:creationId xmlns:a16="http://schemas.microsoft.com/office/drawing/2014/main" id="{3BFA91D7-B506-539E-10C5-FA01AC7A649F}"/>
+                <a16:creationId xmlns:a16="http://schemas.microsoft.com/office/drawing/2014/main" id="{B9D228F9-69E9-C9FC-C60F-078C9232D240}"/>
               </a:ext>
             </a:extLst>
           </p:cNvPr>
@@ -7654,8 +8060,8 @@
         </p:nvSpPr>
         <p:spPr>
           <a:xfrm>
-            <a:off x="0" y="0"/>
-            <a:ext cx="2659224" cy="523220"/>
+            <a:off x="81280" y="91440"/>
+            <a:ext cx="5740400" cy="523220"/>
           </a:xfrm>
           <a:prstGeom prst="rect">
             <a:avLst/>
@@ -7670,7 +8076,7 @@
           <a:p>
             <a:r>
               <a:rPr lang="en-US" sz="2800" b="1"/>
-              <a:t>Crypto ATM</a:t>
+              <a:t>Cryptocurrency exchange / swap</a:t>
             </a:r>
           </a:p>
         </p:txBody>
@@ -7680,7 +8086,7 @@
           <p:cNvPr id="3" name="TextBox 2">
             <a:extLst>
               <a:ext uri="{FF2B5EF4-FFF2-40B4-BE49-F238E27FC236}">
-                <a16:creationId xmlns:a16="http://schemas.microsoft.com/office/drawing/2014/main" id="{E6C2485C-F55A-A5C5-C9EA-19A8FFA5C14A}"/>
+                <a16:creationId xmlns:a16="http://schemas.microsoft.com/office/drawing/2014/main" id="{71663493-9CCC-0B63-8C42-C44D7D0401CC}"/>
               </a:ext>
             </a:extLst>
           </p:cNvPr>
@@ -7689,8 +8095,8 @@
         </p:nvSpPr>
         <p:spPr>
           <a:xfrm>
-            <a:off x="0" y="534364"/>
-            <a:ext cx="4348065" cy="2677656"/>
+            <a:off x="81280" y="914797"/>
+            <a:ext cx="8402320" cy="3539430"/>
           </a:xfrm>
           <a:prstGeom prst="rect">
             <a:avLst/>
@@ -7703,13 +8109,64 @@
           </a:bodyPr>
           <a:lstStyle/>
           <a:p>
+            <a:r>
+              <a:rPr lang="en-US" sz="1400"/>
+              <a:t>You can buy Ethereum with Bitcoin on nearly any cryptocurrency exchange. </a:t>
+            </a:r>
+          </a:p>
+          <a:p>
+            <a:r>
+              <a:rPr lang="en-US" sz="1400"/>
+              <a:t>This is because </a:t>
+            </a:r>
+            <a:r>
+              <a:rPr lang="en-US" sz="1400" b="1">
+                <a:solidFill>
+                  <a:srgbClr val="00B050"/>
+                </a:solidFill>
+              </a:rPr>
+              <a:t>most of the global Ethereum trading volume</a:t>
+            </a:r>
+            <a:r>
+              <a:rPr lang="en-US" sz="1400"/>
+              <a:t> is actually </a:t>
+            </a:r>
+          </a:p>
+          <a:p>
+            <a:r>
+              <a:rPr lang="en-US" sz="1400" b="1">
+                <a:solidFill>
+                  <a:srgbClr val="00B050"/>
+                </a:solidFill>
+              </a:rPr>
+              <a:t>done in the ETH/BTC pair</a:t>
+            </a:r>
+            <a:r>
+              <a:rPr lang="en-US" sz="1400"/>
+              <a:t>, and not the ETH/USD pair.</a:t>
+            </a:r>
+          </a:p>
+          <a:p>
+            <a:endParaRPr lang="en-US" sz="1400"/>
+          </a:p>
+          <a:p>
             <a:pPr marL="285750" indent="-285750">
               <a:buFont typeface="Arial" panose="020B0604020202020204" pitchFamily="34" charset="0"/>
               <a:buChar char="•"/>
             </a:pPr>
             <a:r>
               <a:rPr lang="en-US" sz="1400"/>
-              <a:t>A crypto ATM is an Internet-connected kiosk that allows customers to purchase bitcoins and/or other cryptocurrencies with deposited cash and make blockchain-based transactions that send cryptocurrencies to the user's digital wallet, often via the use of a QR code.</a:t>
+              <a:t>Coinbase – convert - </a:t>
+            </a:r>
+            <a:r>
+              <a:rPr lang="en-US" sz="1400">
+                <a:hlinkClick r:id="rId2"/>
+              </a:rPr>
+              <a:t>https://www.youtube.com/watch?v=bzLd7V2ZLp8</a:t>
+            </a:r>
+            <a:r>
+              <a:rPr lang="en-US" sz="1400"/>
+              <a:t> </a:t>
             </a:r>
           </a:p>
           <a:p>
@@ -7719,7 +8176,24 @@
             </a:pPr>
             <a:r>
               <a:rPr lang="en-US" sz="1400"/>
-              <a:t>There are currently (Summer 2021) more than 14,000 bitcoin ATMs in operation around the world.</a:t>
+              <a:t>BitPay does not directly buy or sell cryptocurrency, therefore, if you want to sell your cryptocurrency (cash your funds out), you need to do it with a third party (an exchange). </a:t>
+            </a:r>
+            <a:br>
+              <a:rPr lang="en-US" sz="1400"/>
+            </a:br>
+            <a:r>
+              <a:rPr lang="en-US" sz="1400"/>
+              <a:t>BitPay can convert Crypto to regular currency - </a:t>
+            </a:r>
+            <a:r>
+              <a:rPr lang="en-US" sz="1400">
+                <a:hlinkClick r:id="rId3"/>
+              </a:rPr>
+              <a:t>https://bitpay.com/exchange-rates/</a:t>
+            </a:r>
+            <a:r>
+              <a:rPr lang="en-US" sz="1400"/>
+              <a:t> </a:t>
             </a:r>
           </a:p>
           <a:p>
@@ -7728,18 +8202,99 @@
               <a:buChar char="•"/>
             </a:pPr>
             <a:r>
-              <a:rPr lang="en-US" sz="1400"/>
-              <a:t>A bitcoin ATM is not the same as an automated teller machine (ATM) that allows bank customers to physically withdraw, deposit, or transfer funds in one's bank account.</a:t>
+              <a:rPr lang="en-US" sz="1400">
+                <a:hlinkClick r:id="rId4"/>
+              </a:rPr>
+              <a:t>https://medium.com/@mark.lasia/how-to-exchange-bitcoin-and-tokens-into-eth-ether-with-shapeshift-io-6a326b339c12</a:t>
+            </a:r>
+            <a:endParaRPr lang="en-US" sz="1400"/>
+          </a:p>
+          <a:p>
+            <a:pPr marL="285750" indent="-285750">
+              <a:buFont typeface="Arial" panose="020B0604020202020204" pitchFamily="34" charset="0"/>
+              <a:buChar char="•"/>
+            </a:pPr>
+            <a:r>
+              <a:rPr lang="en-US" sz="1400">
+                <a:hlinkClick r:id="rId5"/>
+              </a:rPr>
+              <a:t>https://www.buybitcoinworldwide.com/ethereum/buy/</a:t>
+            </a:r>
+            <a:endParaRPr lang="en-US" sz="1400"/>
+          </a:p>
+          <a:p>
+            <a:pPr marL="285750" indent="-285750">
+              <a:buFont typeface="Arial" panose="020B0604020202020204" pitchFamily="34" charset="0"/>
+              <a:buChar char="•"/>
+            </a:pPr>
+            <a:r>
+              <a:rPr lang="en-US" sz="1400">
+                <a:hlinkClick r:id="rId6"/>
+              </a:rPr>
+              <a:t>https://letsexchange.io/exchange/btc-to-eth</a:t>
+            </a:r>
+            <a:endParaRPr lang="en-US" sz="1400"/>
+          </a:p>
+          <a:p>
+            <a:pPr marL="285750" indent="-285750">
+              <a:buFont typeface="Arial" panose="020B0604020202020204" pitchFamily="34" charset="0"/>
+              <a:buChar char="•"/>
+            </a:pPr>
+            <a:r>
+              <a:rPr lang="en-US" sz="1400">
+                <a:hlinkClick r:id="rId7"/>
+              </a:rPr>
+              <a:t>https://simpleswap.io/crypto-to-crypto/btc-eth</a:t>
+            </a:r>
+            <a:endParaRPr lang="en-US" sz="1400"/>
+          </a:p>
+          <a:p>
+            <a:pPr marL="285750" indent="-285750">
+              <a:buFont typeface="Arial" panose="020B0604020202020204" pitchFamily="34" charset="0"/>
+              <a:buChar char="•"/>
+            </a:pPr>
+            <a:r>
+              <a:rPr lang="en-US" sz="1400">
+                <a:hlinkClick r:id="rId8"/>
+              </a:rPr>
+              <a:t>https://liquality.io/blog/atomic-swaps-explained/</a:t>
+            </a:r>
+            <a:r>
+              <a:rPr lang="en-US" sz="1400"/>
+              <a:t> </a:t>
+            </a:r>
+          </a:p>
+          <a:p>
+            <a:pPr marL="285750" indent="-285750">
+              <a:buFont typeface="Arial" panose="020B0604020202020204" pitchFamily="34" charset="0"/>
+              <a:buChar char="•"/>
+            </a:pPr>
+            <a:r>
+              <a:rPr lang="en-US" sz="1400">
+                <a:hlinkClick r:id="rId9"/>
+              </a:rPr>
+              <a:t>https://liquality.io/blog/hash-time-locked-contracts-htlcs-explained/</a:t>
+            </a:r>
+            <a:endParaRPr lang="en-US" sz="1400"/>
+          </a:p>
+          <a:p>
+            <a:pPr marL="285750" indent="-285750">
+              <a:buFont typeface="Arial" panose="020B0604020202020204" pitchFamily="34" charset="0"/>
+              <a:buChar char="•"/>
+            </a:pPr>
+            <a:r>
+              <a:rPr lang="en-US" sz="1400"/>
+              <a:t>etc. etc.</a:t>
             </a:r>
           </a:p>
         </p:txBody>
       </p:sp>
       <p:pic>
         <p:nvPicPr>
-          <p:cNvPr id="5" name="Picture 4">
+          <p:cNvPr id="4" name="Picture 3">
             <a:extLst>
               <a:ext uri="{FF2B5EF4-FFF2-40B4-BE49-F238E27FC236}">
-                <a16:creationId xmlns:a16="http://schemas.microsoft.com/office/drawing/2014/main" id="{D5FAF214-85CA-D21E-7320-0CBC459EE6A0}"/>
+                <a16:creationId xmlns:a16="http://schemas.microsoft.com/office/drawing/2014/main" id="{15F5A62C-0D73-F9D5-0625-C916AA89DB22}"/>
               </a:ext>
             </a:extLst>
           </p:cNvPr>
@@ -7749,7 +8304,7 @@
           <p:nvPr/>
         </p:nvPicPr>
         <p:blipFill>
-          <a:blip r:embed="rId2" cstate="email">
+          <a:blip r:embed="rId10" cstate="email">
             <a:extLst>
               <a:ext uri="{28A0092B-C50C-407E-A947-70E740481C1C}">
                 <a14:useLocalDpi xmlns:a14="http://schemas.microsoft.com/office/drawing/2010/main"/>
@@ -7762,126 +8317,88 @@
         </p:blipFill>
         <p:spPr>
           <a:xfrm>
-            <a:off x="8114905" y="123112"/>
-            <a:ext cx="3094000" cy="3954364"/>
+            <a:off x="6482080" y="3933984"/>
+            <a:ext cx="5302250" cy="1783298"/>
           </a:xfrm>
           <a:prstGeom prst="rect">
             <a:avLst/>
           </a:prstGeom>
         </p:spPr>
       </p:pic>
-      <p:pic>
-        <p:nvPicPr>
-          <p:cNvPr id="6" name="Picture 5">
+      <p:sp>
+        <p:nvSpPr>
+          <p:cNvPr id="5" name="TextBox 4">
             <a:extLst>
               <a:ext uri="{FF2B5EF4-FFF2-40B4-BE49-F238E27FC236}">
-                <a16:creationId xmlns:a16="http://schemas.microsoft.com/office/drawing/2014/main" id="{B83CB1FB-66A2-0280-42C8-A1E020EAF0A1}"/>
+                <a16:creationId xmlns:a16="http://schemas.microsoft.com/office/drawing/2014/main" id="{35A0BC28-F265-10D1-C05B-CB42689C0F6B}"/>
               </a:ext>
             </a:extLst>
           </p:cNvPr>
-          <p:cNvPicPr>
-            <a:picLocks noChangeAspect="1"/>
-          </p:cNvPicPr>
+          <p:cNvSpPr txBox="1"/>
           <p:nvPr/>
-        </p:nvPicPr>
-        <p:blipFill>
-          <a:blip r:embed="rId3" cstate="email">
-            <a:extLst>
-              <a:ext uri="{28A0092B-C50C-407E-A947-70E740481C1C}">
-                <a14:useLocalDpi xmlns:a14="http://schemas.microsoft.com/office/drawing/2010/main"/>
-              </a:ext>
-            </a:extLst>
-          </a:blip>
-          <a:stretch>
-            <a:fillRect/>
-          </a:stretch>
-        </p:blipFill>
-        <p:spPr>
-          <a:xfrm>
-            <a:off x="5516122" y="123112"/>
-            <a:ext cx="2327815" cy="3954364"/>
+        </p:nvSpPr>
+        <p:spPr>
+          <a:xfrm>
+            <a:off x="7304405" y="5811272"/>
+            <a:ext cx="3657600" cy="954107"/>
           </a:xfrm>
           <a:prstGeom prst="rect">
             <a:avLst/>
           </a:prstGeom>
-        </p:spPr>
-      </p:pic>
-      <p:pic>
-        <p:nvPicPr>
-          <p:cNvPr id="7" name="Picture 6">
-            <a:extLst>
-              <a:ext uri="{FF2B5EF4-FFF2-40B4-BE49-F238E27FC236}">
-                <a16:creationId xmlns:a16="http://schemas.microsoft.com/office/drawing/2014/main" id="{B209FA30-F941-A056-3CBD-2D9804B89DBB}"/>
-              </a:ext>
-            </a:extLst>
-          </p:cNvPr>
-          <p:cNvPicPr>
-            <a:picLocks noChangeAspect="1"/>
-          </p:cNvPicPr>
-          <p:nvPr/>
-        </p:nvPicPr>
-        <p:blipFill>
-          <a:blip r:embed="rId4" cstate="email">
-            <a:extLst>
-              <a:ext uri="{28A0092B-C50C-407E-A947-70E740481C1C}">
-                <a14:useLocalDpi xmlns:a14="http://schemas.microsoft.com/office/drawing/2010/main"/>
-              </a:ext>
-            </a:extLst>
-          </a:blip>
-          <a:stretch>
-            <a:fillRect/>
-          </a:stretch>
-        </p:blipFill>
-        <p:spPr>
-          <a:xfrm>
-            <a:off x="96942" y="3369853"/>
-            <a:ext cx="4978911" cy="3402097"/>
-          </a:xfrm>
-          <a:prstGeom prst="rect">
-            <a:avLst/>
-          </a:prstGeom>
-        </p:spPr>
-      </p:pic>
-      <p:pic>
-        <p:nvPicPr>
-          <p:cNvPr id="8" name="Picture 7">
-            <a:extLst>
-              <a:ext uri="{FF2B5EF4-FFF2-40B4-BE49-F238E27FC236}">
-                <a16:creationId xmlns:a16="http://schemas.microsoft.com/office/drawing/2014/main" id="{536BDA42-012E-19F1-6188-0698AE2AC3C2}"/>
-              </a:ext>
-            </a:extLst>
-          </p:cNvPr>
-          <p:cNvPicPr>
-            <a:picLocks noChangeAspect="1"/>
-          </p:cNvPicPr>
-          <p:nvPr/>
-        </p:nvPicPr>
-        <p:blipFill>
-          <a:blip r:embed="rId5" cstate="email">
-            <a:extLst>
-              <a:ext uri="{28A0092B-C50C-407E-A947-70E740481C1C}">
-                <a14:useLocalDpi xmlns:a14="http://schemas.microsoft.com/office/drawing/2010/main"/>
-              </a:ext>
-            </a:extLst>
-          </a:blip>
-          <a:stretch>
-            <a:fillRect/>
-          </a:stretch>
-        </p:blipFill>
-        <p:spPr>
-          <a:xfrm>
-            <a:off x="5516122" y="4373901"/>
-            <a:ext cx="2327814" cy="2398049"/>
-          </a:xfrm>
-          <a:prstGeom prst="rect">
-            <a:avLst/>
-          </a:prstGeom>
-        </p:spPr>
-      </p:pic>
+          <a:noFill/>
+        </p:spPr>
+        <p:txBody>
+          <a:bodyPr wrap="square" rtlCol="0">
+            <a:spAutoFit/>
+          </a:bodyPr>
+          <a:lstStyle/>
+          <a:p>
+            <a:pPr algn="ctr"/>
+            <a:r>
+              <a:rPr lang="en-US" sz="1400" b="1">
+                <a:solidFill>
+                  <a:srgbClr val="FF0000"/>
+                </a:solidFill>
+              </a:rPr>
+              <a:t>Atomic Swaps</a:t>
+            </a:r>
+            <a:r>
+              <a:rPr lang="en-US" sz="1400"/>
+              <a:t> - Swapping Cryptocurrencies Without Trusted Third Party Mediation</a:t>
+            </a:r>
+          </a:p>
+          <a:p>
+            <a:pPr algn="ctr"/>
+            <a:r>
+              <a:rPr lang="en-US" sz="1400"/>
+              <a:t>using programmable Escrows</a:t>
+            </a:r>
+          </a:p>
+          <a:p>
+            <a:pPr algn="ctr"/>
+            <a:r>
+              <a:rPr lang="en-US" sz="1400"/>
+              <a:t>(</a:t>
+            </a:r>
+            <a:r>
+              <a:rPr lang="en-US" sz="1400" b="1">
+                <a:solidFill>
+                  <a:srgbClr val="FF0000"/>
+                </a:solidFill>
+              </a:rPr>
+              <a:t>HTLCs</a:t>
+            </a:r>
+            <a:r>
+              <a:rPr lang="en-US" sz="1400"/>
+              <a:t> = Hash Time Locked Contracts)</a:t>
+            </a:r>
+          </a:p>
+        </p:txBody>
+      </p:sp>
     </p:spTree>
     <p:extLst>
       <p:ext uri="{BB962C8B-B14F-4D97-AF65-F5344CB8AC3E}">
-        <p14:creationId xmlns:p14="http://schemas.microsoft.com/office/powerpoint/2010/main" val="829535307"/>
+        <p14:creationId xmlns:p14="http://schemas.microsoft.com/office/powerpoint/2010/main" val="3838443378"/>
       </p:ext>
     </p:extLst>
   </p:cSld>
